--- a/docs/pharmacy-inventory-deck.pptx
+++ b/docs/pharmacy-inventory-deck.pptx
@@ -6394,7 +6394,7 @@
                 <a:ea typeface="Cambria" pitchFamily="34" charset="-122"/>
                 <a:cs typeface="Cambria" pitchFamily="34" charset="-120"/>
               </a:rPr>
-              <a:t>40</a:t>
+              <a:t>42</a:t>
             </a:r>
             <a:endParaRPr lang="en-US" sz="4800" dirty="0"/>
           </a:p>
@@ -6433,7 +6433,7 @@
                 <a:ea typeface="Calibri" pitchFamily="34" charset="-122"/>
                 <a:cs typeface="Calibri" pitchFamily="34" charset="-120"/>
               </a:rPr>
-              <a:t>tables, 2 views, 89 foreign keys</a:t>
+              <a:t>tables, 2 views, 92 foreign keys</a:t>
             </a:r>
             <a:endParaRPr lang="en-US" sz="1200" dirty="0"/>
           </a:p>
@@ -6472,7 +6472,7 @@
                 <a:ea typeface="Cambria" pitchFamily="34" charset="-122"/>
                 <a:cs typeface="Cambria" pitchFamily="34" charset="-120"/>
               </a:rPr>
-              <a:t>88</a:t>
+              <a:t>96</a:t>
             </a:r>
             <a:endParaRPr lang="en-US" sz="4800" dirty="0"/>
           </a:p>
@@ -6628,7 +6628,7 @@
                 <a:ea typeface="Cambria" pitchFamily="34" charset="-122"/>
                 <a:cs typeface="Cambria" pitchFamily="34" charset="-120"/>
               </a:rPr>
-              <a:t>284</a:t>
+              <a:t>392</a:t>
             </a:r>
             <a:endParaRPr lang="en-US" sz="4800" dirty="0"/>
           </a:p>

--- a/docs/pharmacy-inventory-deck.pptx
+++ b/docs/pharmacy-inventory-deck.pptx
@@ -16,6 +16,9 @@
     <p:sldId id="264" r:id="rId10"/>
     <p:sldId id="265" r:id="rId11"/>
     <p:sldId id="266" r:id="rId12"/>
+    <p:sldId id="274" r:id="rId25"/>
+    <p:sldId id="275" r:id="rId26"/>
+    <p:sldId id="276" r:id="rId27"/>
     <p:sldId id="267" r:id="rId13"/>
     <p:sldId id="268" r:id="rId14"/>
     <p:sldId id="269" r:id="rId15"/>
@@ -1630,6 +1633,76 @@
 </p:notes>
 </file>
 
+<file path=ppt/notesSlides/notesSlide19.xml><?xml version="1.0" encoding="utf-8"?>
+<p:notes xmlns:a="http://schemas.openxmlformats.org/drawingml/2006/main" xmlns:p="http://schemas.openxmlformats.org/presentationml/2006/main" xmlns:r="http://schemas.openxmlformats.org/officeDocument/2006/relationships">
+  <p:cSld>
+    <p:spTree>
+      <p:nvGrpSpPr>
+        <p:cNvPr id="1" name=""/>
+        <p:cNvGrpSpPr/>
+        <p:nvPr/>
+      </p:nvGrpSpPr>
+      <p:grpSpPr>
+        <a:xfrm>
+          <a:off x="0" y="0"/>
+          <a:ext cx="0" cy="0"/>
+          <a:chOff x="0" y="0"/>
+          <a:chExt cx="0" cy="0"/>
+        </a:xfrm>
+      </p:grpSpPr>
+      <p:sp>
+        <p:nvSpPr>
+          <p:cNvPr id="2" name="Slide Image Placeholder 1"/>
+          <p:cNvSpPr>
+            <a:spLocks noGrp="1"/>
+          </p:cNvSpPr>
+          <p:nvPr>
+            <p:ph type="sldImg" idx="2"/>
+          </p:nvPr>
+        </p:nvSpPr>
+        <p:spPr/>
+      </p:sp>
+      <p:sp>
+        <p:nvSpPr>
+          <p:cNvPr id="3" name="Notes Placeholder 2"/>
+          <p:cNvSpPr>
+            <a:spLocks noGrp="1"/>
+          </p:cNvSpPr>
+          <p:nvPr>
+            <p:ph type="body" idx="3" sz="quarter"/>
+          </p:nvPr>
+        </p:nvSpPr>
+        <p:spPr/>
+        <p:txBody>
+          <a:bodyPr/>
+          <a:lstStyle/>
+          <a:p>
+            <a:r>
+              <a:t>Prompt wording is not a control. 'Ignore previous instructions' works often enough that relying on it would be negligence. A jailbreak buys the ability to propose a DROP — which is then refused unread.</a:t>
+            </a:r>
+          </a:p>
+        </p:txBody>
+      </p:sp>
+      <p:sp>
+        <p:nvSpPr>
+          <p:cNvPr id="4" name="Slide Number Placeholder 3"/>
+          <p:cNvSpPr>
+            <a:spLocks noGrp="1"/>
+          </p:cNvSpPr>
+          <p:nvPr>
+            <p:ph type="sldNum" idx="5" sz="quarter"/>
+          </p:nvPr>
+        </p:nvSpPr>
+        <p:spPr/>
+      </p:sp>
+    </p:spTree>
+  </p:cSld>
+  <p:clrMapOvr>
+    <a:masterClrMapping/>
+  </p:clrMapOvr>
+</p:notes>
+</file>
+
 <file path=ppt/notesSlides/notesSlide2.xml><?xml version="1.0" encoding="utf-8"?>
 <p:notes xmlns:a="http://schemas.openxmlformats.org/drawingml/2006/main" xmlns:r="http://schemas.openxmlformats.org/officeDocument/2006/relationships" xmlns:p="http://schemas.openxmlformats.org/presentationml/2006/main">
   <p:cSld>
@@ -1711,6 +1784,146 @@
         <p14:creationId xmlns:p14="http://schemas.microsoft.com/office/powerpoint/2010/main" val="1024086991"/>
       </p:ext>
     </p:extLst>
+  </p:cSld>
+  <p:clrMapOvr>
+    <a:masterClrMapping/>
+  </p:clrMapOvr>
+</p:notes>
+</file>
+
+<file path=ppt/notesSlides/notesSlide20.xml><?xml version="1.0" encoding="utf-8"?>
+<p:notes xmlns:a="http://schemas.openxmlformats.org/drawingml/2006/main" xmlns:p="http://schemas.openxmlformats.org/presentationml/2006/main" xmlns:r="http://schemas.openxmlformats.org/officeDocument/2006/relationships">
+  <p:cSld>
+    <p:spTree>
+      <p:nvGrpSpPr>
+        <p:cNvPr id="1" name=""/>
+        <p:cNvGrpSpPr/>
+        <p:nvPr/>
+      </p:nvGrpSpPr>
+      <p:grpSpPr>
+        <a:xfrm>
+          <a:off x="0" y="0"/>
+          <a:ext cx="0" cy="0"/>
+          <a:chOff x="0" y="0"/>
+          <a:chExt cx="0" cy="0"/>
+        </a:xfrm>
+      </p:grpSpPr>
+      <p:sp>
+        <p:nvSpPr>
+          <p:cNvPr id="2" name="Slide Image Placeholder 1"/>
+          <p:cNvSpPr>
+            <a:spLocks noGrp="1"/>
+          </p:cNvSpPr>
+          <p:nvPr>
+            <p:ph type="sldImg" idx="2"/>
+          </p:nvPr>
+        </p:nvSpPr>
+        <p:spPr/>
+      </p:sp>
+      <p:sp>
+        <p:nvSpPr>
+          <p:cNvPr id="3" name="Notes Placeholder 2"/>
+          <p:cNvSpPr>
+            <a:spLocks noGrp="1"/>
+          </p:cNvSpPr>
+          <p:nvPr>
+            <p:ph type="body" idx="3" sz="quarter"/>
+          </p:nvPr>
+        </p:nvSpPr>
+        <p:spPr/>
+        <p:txBody>
+          <a:bodyPr/>
+          <a:lstStyle/>
+          <a:p>
+            <a:r>
+              <a:t>A text-to-SQL feature does not fail loudly. It returns a table, and a table looks like an answer. Only ground truth written by hand told these four apart from the forty-three that were right.</a:t>
+            </a:r>
+          </a:p>
+        </p:txBody>
+      </p:sp>
+      <p:sp>
+        <p:nvSpPr>
+          <p:cNvPr id="4" name="Slide Number Placeholder 3"/>
+          <p:cNvSpPr>
+            <a:spLocks noGrp="1"/>
+          </p:cNvSpPr>
+          <p:nvPr>
+            <p:ph type="sldNum" idx="5" sz="quarter"/>
+          </p:nvPr>
+        </p:nvSpPr>
+        <p:spPr/>
+      </p:sp>
+    </p:spTree>
+  </p:cSld>
+  <p:clrMapOvr>
+    <a:masterClrMapping/>
+  </p:clrMapOvr>
+</p:notes>
+</file>
+
+<file path=ppt/notesSlides/notesSlide21.xml><?xml version="1.0" encoding="utf-8"?>
+<p:notes xmlns:a="http://schemas.openxmlformats.org/drawingml/2006/main" xmlns:p="http://schemas.openxmlformats.org/presentationml/2006/main" xmlns:r="http://schemas.openxmlformats.org/officeDocument/2006/relationships">
+  <p:cSld>
+    <p:spTree>
+      <p:nvGrpSpPr>
+        <p:cNvPr id="1" name=""/>
+        <p:cNvGrpSpPr/>
+        <p:nvPr/>
+      </p:nvGrpSpPr>
+      <p:grpSpPr>
+        <a:xfrm>
+          <a:off x="0" y="0"/>
+          <a:ext cx="0" cy="0"/>
+          <a:chOff x="0" y="0"/>
+          <a:chExt cx="0" cy="0"/>
+        </a:xfrm>
+      </p:grpSpPr>
+      <p:sp>
+        <p:nvSpPr>
+          <p:cNvPr id="2" name="Slide Image Placeholder 1"/>
+          <p:cNvSpPr>
+            <a:spLocks noGrp="1"/>
+          </p:cNvSpPr>
+          <p:nvPr>
+            <p:ph type="sldImg" idx="2"/>
+          </p:nvPr>
+        </p:nvSpPr>
+        <p:spPr/>
+      </p:sp>
+      <p:sp>
+        <p:nvSpPr>
+          <p:cNvPr id="3" name="Notes Placeholder 2"/>
+          <p:cNvSpPr>
+            <a:spLocks noGrp="1"/>
+          </p:cNvSpPr>
+          <p:nvPr>
+            <p:ph type="body" idx="3" sz="quarter"/>
+          </p:nvPr>
+        </p:nvSpPr>
+        <p:spPr/>
+        <p:txBody>
+          <a:bodyPr/>
+          <a:lstStyle/>
+          <a:p>
+            <a:r>
+              <a:t>This is the failure mode nobody thinks about. An empty result is indistinguishable from a true zero, so the honest move is to decline before running anything at all.</a:t>
+            </a:r>
+          </a:p>
+        </p:txBody>
+      </p:sp>
+      <p:sp>
+        <p:nvSpPr>
+          <p:cNvPr id="4" name="Slide Number Placeholder 3"/>
+          <p:cNvSpPr>
+            <a:spLocks noGrp="1"/>
+          </p:cNvSpPr>
+          <p:nvPr>
+            <p:ph type="sldNum" idx="5" sz="quarter"/>
+          </p:nvPr>
+        </p:nvSpPr>
+        <p:spPr/>
+      </p:sp>
+    </p:spTree>
   </p:cSld>
   <p:clrMapOvr>
     <a:masterClrMapping/>
@@ -2795,7 +3008,7 @@
         <p:spPr>
           <a:xfrm>
             <a:off x="640080" y="4343400"/>
-            <a:ext cx="9692640" cy="457200"/>
+            <a:ext cx="11247120" cy="457200"/>
           </a:xfrm>
           <a:prstGeom prst="rect">
             <a:avLst/>
@@ -2819,7 +3032,7 @@
                 <a:ea typeface="Calibri" pitchFamily="34" charset="-122"/>
                 <a:cs typeface="Calibri" pitchFamily="34" charset="-120"/>
               </a:rPr>
-              <a:t>Multi-branch stock, tracked by batch and expiry — with AI-assisted invoice intake</a:t>
+              <a:t>Multi-branch stock, tracked by batch and expiry — with AI that is never trusted</a:t>
             </a:r>
             <a:endParaRPr lang="en-US" sz="1900" dirty="0"/>
           </a:p>
@@ -4033,6 +4246,2209 @@
 
 <file path=ppt/slides/slide12.xml><?xml version="1.0" encoding="utf-8"?>
 <p:sld xmlns:a="http://schemas.openxmlformats.org/drawingml/2006/main" xmlns:r="http://schemas.openxmlformats.org/officeDocument/2006/relationships" xmlns:p="http://schemas.openxmlformats.org/presentationml/2006/main">
+  <p:cSld name="Slide 8">
+    <p:bg>
+      <p:bgPr>
+        <a:solidFill>
+          <a:srgbClr val="FFFFFF"/>
+        </a:solidFill>
+      </p:bgPr>
+    </p:bg>
+    <p:spTree>
+      <p:nvGrpSpPr>
+        <p:cNvPr id="1" name=""/>
+        <p:cNvGrpSpPr/>
+        <p:nvPr/>
+      </p:nvGrpSpPr>
+      <p:grpSpPr>
+        <a:xfrm>
+          <a:off x="0" y="0"/>
+          <a:ext cx="0" cy="0"/>
+          <a:chOff x="0" y="0"/>
+          <a:chExt cx="0" cy="0"/>
+        </a:xfrm>
+      </p:grpSpPr>
+      <p:sp>
+        <p:nvSpPr>
+          <p:cNvPr id="2" name="Text 0"/>
+          <p:cNvSpPr/>
+          <p:nvPr/>
+        </p:nvSpPr>
+        <p:spPr>
+          <a:xfrm>
+            <a:off x="640080" y="384048"/>
+            <a:ext cx="7315200" cy="256032"/>
+          </a:xfrm>
+          <a:prstGeom prst="rect">
+            <a:avLst/>
+          </a:prstGeom>
+          <a:noFill/>
+          <a:ln/>
+        </p:spPr>
+        <p:txBody>
+          <a:bodyPr wrap="square" lIns="0" tIns="0" rIns="0" bIns="0" rtlCol="0" anchor="ctr"/>
+          <a:lstStyle/>
+          <a:p>
+            <a:pPr indent="0" marL="0">
+              <a:buNone/>
+            </a:pPr>
+            <a:r>
+              <a:rPr lang="en-US" sz="1200" b="1" spc="200" kern="0" dirty="0">
+                <a:solidFill>
+                  <a:srgbClr val="00A896"/>
+                </a:solidFill>
+                <a:latin typeface="Calibri" pitchFamily="34" charset="0"/>
+                <a:ea typeface="Calibri" pitchFamily="34" charset="-122"/>
+                <a:cs typeface="Calibri" pitchFamily="34" charset="-120"/>
+              </a:rPr>
+              <a:t>TEXT TO SQL</a:t>
+            </a:r>
+            <a:endParaRPr lang="en-US" sz="1200" dirty="0"/>
+          </a:p>
+        </p:txBody>
+      </p:sp>
+      <p:sp>
+        <p:nvSpPr>
+          <p:cNvPr id="3" name="Text 1"/>
+          <p:cNvSpPr/>
+          <p:nvPr/>
+        </p:nvSpPr>
+        <p:spPr>
+          <a:xfrm>
+            <a:off x="640080" y="658368"/>
+            <a:ext cx="10881360" cy="777240"/>
+          </a:xfrm>
+          <a:prstGeom prst="rect">
+            <a:avLst/>
+          </a:prstGeom>
+          <a:noFill/>
+          <a:ln/>
+        </p:spPr>
+        <p:txBody>
+          <a:bodyPr wrap="square" lIns="0" tIns="0" rIns="0" bIns="0" rtlCol="0" anchor="ctr"/>
+          <a:lstStyle/>
+          <a:p>
+            <a:pPr indent="0" marL="0">
+              <a:buNone/>
+            </a:pPr>
+            <a:r>
+              <a:rPr lang="en-US" sz="3600" b="1" dirty="0">
+                <a:solidFill>
+                  <a:srgbClr val="13272B"/>
+                </a:solidFill>
+                <a:latin typeface="Cambria" pitchFamily="34" charset="0"/>
+                <a:ea typeface="Cambria" pitchFamily="34" charset="-122"/>
+                <a:cs typeface="Cambria" pitchFamily="34" charset="-120"/>
+              </a:rPr>
+              <a:t>The same rule, on a harder surface</a:t>
+            </a:r>
+            <a:endParaRPr lang="en-US" sz="3600" dirty="0"/>
+          </a:p>
+        </p:txBody>
+      </p:sp>
+      <p:sp>
+        <p:nvSpPr>
+          <p:cNvPr id="4" name="Shape 2"/>
+          <p:cNvSpPr/>
+          <p:nvPr/>
+        </p:nvSpPr>
+        <p:spPr>
+          <a:xfrm>
+            <a:off x="640080" y="2148840"/>
+            <a:ext cx="10881360" cy="960120"/>
+          </a:xfrm>
+          <a:prstGeom prst="roundRect">
+            <a:avLst>
+              <a:gd name="adj" fmla="val 5882"/>
+            </a:avLst>
+          </a:prstGeom>
+          <a:solidFill>
+            <a:srgbClr val="F4F8F8"/>
+          </a:solidFill>
+          <a:ln w="12700">
+            <a:solidFill>
+              <a:srgbClr val="DCE6E7"/>
+            </a:solidFill>
+            <a:prstDash val="solid"/>
+          </a:ln>
+        </p:spPr>
+      </p:sp>
+      <p:sp>
+        <p:nvSpPr>
+          <p:cNvPr id="5" name="Shape 3"/>
+          <p:cNvSpPr/>
+          <p:nvPr/>
+        </p:nvSpPr>
+        <p:spPr>
+          <a:xfrm>
+            <a:off x="932688" y="2395728"/>
+            <a:ext cx="475488" cy="475488"/>
+          </a:xfrm>
+          <a:prstGeom prst="ellipse">
+            <a:avLst/>
+          </a:prstGeom>
+          <a:solidFill>
+            <a:srgbClr val="028090"/>
+          </a:solidFill>
+          <a:ln/>
+        </p:spPr>
+      </p:sp>
+      <p:sp>
+        <p:nvSpPr>
+          <p:cNvPr id="6" name="Text 4"/>
+          <p:cNvSpPr/>
+          <p:nvPr/>
+        </p:nvSpPr>
+        <p:spPr>
+          <a:xfrm>
+            <a:off x="932688" y="2395728"/>
+            <a:ext cx="475488" cy="475488"/>
+          </a:xfrm>
+          <a:prstGeom prst="rect">
+            <a:avLst/>
+          </a:prstGeom>
+          <a:noFill/>
+          <a:ln/>
+        </p:spPr>
+        <p:txBody>
+          <a:bodyPr wrap="square" lIns="0" tIns="0" rIns="0" bIns="0" rtlCol="0" anchor="ctr"/>
+          <a:lstStyle/>
+          <a:p>
+            <a:pPr algn="ctr" indent="0" marL="0">
+              <a:buNone/>
+            </a:pPr>
+            <a:r>
+              <a:rPr lang="en-US" sz="1400" b="1" dirty="0">
+                <a:solidFill>
+                  <a:srgbClr val="FFFFFF"/>
+                </a:solidFill>
+                <a:latin typeface="Calibri" pitchFamily="34" charset="0"/>
+                <a:ea typeface="Calibri" pitchFamily="34" charset="-122"/>
+                <a:cs typeface="Calibri" pitchFamily="34" charset="-120"/>
+              </a:rPr>
+              <a:t>1</a:t>
+            </a:r>
+            <a:endParaRPr lang="en-US" sz="1400" dirty="0"/>
+          </a:p>
+        </p:txBody>
+      </p:sp>
+      <p:sp>
+        <p:nvSpPr>
+          <p:cNvPr id="7" name="Text 5"/>
+          <p:cNvSpPr/>
+          <p:nvPr/>
+        </p:nvSpPr>
+        <p:spPr>
+          <a:xfrm>
+            <a:off x="1645920" y="2258568"/>
+            <a:ext cx="9692640" cy="329184"/>
+          </a:xfrm>
+          <a:prstGeom prst="rect">
+            <a:avLst/>
+          </a:prstGeom>
+          <a:noFill/>
+          <a:ln/>
+        </p:spPr>
+        <p:txBody>
+          <a:bodyPr wrap="square" lIns="0" tIns="0" rIns="0" bIns="0" rtlCol="0" anchor="ctr"/>
+          <a:lstStyle/>
+          <a:p>
+            <a:pPr indent="0" marL="0">
+              <a:buNone/>
+            </a:pPr>
+            <a:r>
+              <a:rPr lang="en-US" sz="1700" b="1" dirty="0">
+                <a:solidFill>
+                  <a:srgbClr val="13272B"/>
+                </a:solidFill>
+                <a:latin typeface="Calibri" pitchFamily="34" charset="0"/>
+                <a:ea typeface="Calibri" pitchFamily="34" charset="-122"/>
+                <a:cs typeface="Calibri" pitchFamily="34" charset="-120"/>
+              </a:rPr>
+              <a:t>A guard refuses anything that is not one SELECT</a:t>
+            </a:r>
+            <a:endParaRPr lang="en-US" sz="1700" dirty="0"/>
+          </a:p>
+        </p:txBody>
+      </p:sp>
+      <p:sp>
+        <p:nvSpPr>
+          <p:cNvPr id="8" name="Text 6"/>
+          <p:cNvSpPr/>
+          <p:nvPr/>
+        </p:nvSpPr>
+        <p:spPr>
+          <a:xfrm>
+            <a:off x="1645920" y="2606040"/>
+            <a:ext cx="9692640" cy="402336"/>
+          </a:xfrm>
+          <a:prstGeom prst="rect">
+            <a:avLst/>
+          </a:prstGeom>
+          <a:noFill/>
+          <a:ln/>
+        </p:spPr>
+        <p:txBody>
+          <a:bodyPr wrap="square" lIns="0" tIns="0" rIns="0" bIns="0" rtlCol="0" anchor="ctr"/>
+          <a:lstStyle/>
+          <a:p>
+            <a:pPr indent="0" marL="0">
+              <a:buNone/>
+            </a:pPr>
+            <a:r>
+              <a:rPr lang="en-US" sz="1350" dirty="0">
+                <a:solidFill>
+                  <a:srgbClr val="5C7378"/>
+                </a:solidFill>
+                <a:latin typeface="Calibri" pitchFamily="34" charset="0"/>
+                <a:ea typeface="Calibri" pitchFamily="34" charset="-122"/>
+                <a:cs typeface="Calibri" pitchFamily="34" charset="-120"/>
+              </a:rPr>
+              <a:t>No second statement, no writing CTE, no function that can mutate — rejected before Postgres ever sees it.</a:t>
+            </a:r>
+            <a:endParaRPr lang="en-US" sz="1350" dirty="0"/>
+          </a:p>
+        </p:txBody>
+      </p:sp>
+      <p:sp>
+        <p:nvSpPr>
+          <p:cNvPr id="9" name="Shape 7"/>
+          <p:cNvSpPr/>
+          <p:nvPr/>
+        </p:nvSpPr>
+        <p:spPr>
+          <a:xfrm>
+            <a:off x="640080" y="3200400"/>
+            <a:ext cx="10881360" cy="960120"/>
+          </a:xfrm>
+          <a:prstGeom prst="roundRect">
+            <a:avLst>
+              <a:gd name="adj" fmla="val 5882"/>
+            </a:avLst>
+          </a:prstGeom>
+          <a:solidFill>
+            <a:srgbClr val="F4F8F8"/>
+          </a:solidFill>
+          <a:ln w="12700">
+            <a:solidFill>
+              <a:srgbClr val="DCE6E7"/>
+            </a:solidFill>
+            <a:prstDash val="solid"/>
+          </a:ln>
+        </p:spPr>
+      </p:sp>
+      <p:sp>
+        <p:nvSpPr>
+          <p:cNvPr id="10" name="Shape 8"/>
+          <p:cNvSpPr/>
+          <p:nvPr/>
+        </p:nvSpPr>
+        <p:spPr>
+          <a:xfrm>
+            <a:off x="932688" y="3447288"/>
+            <a:ext cx="475488" cy="475488"/>
+          </a:xfrm>
+          <a:prstGeom prst="ellipse">
+            <a:avLst/>
+          </a:prstGeom>
+          <a:solidFill>
+            <a:srgbClr val="028090"/>
+          </a:solidFill>
+          <a:ln/>
+        </p:spPr>
+      </p:sp>
+      <p:sp>
+        <p:nvSpPr>
+          <p:cNvPr id="11" name="Text 9"/>
+          <p:cNvSpPr/>
+          <p:nvPr/>
+        </p:nvSpPr>
+        <p:spPr>
+          <a:xfrm>
+            <a:off x="932688" y="3447288"/>
+            <a:ext cx="475488" cy="475488"/>
+          </a:xfrm>
+          <a:prstGeom prst="rect">
+            <a:avLst/>
+          </a:prstGeom>
+          <a:noFill/>
+          <a:ln/>
+        </p:spPr>
+        <p:txBody>
+          <a:bodyPr wrap="square" lIns="0" tIns="0" rIns="0" bIns="0" rtlCol="0" anchor="ctr"/>
+          <a:lstStyle/>
+          <a:p>
+            <a:pPr algn="ctr" indent="0" marL="0">
+              <a:buNone/>
+            </a:pPr>
+            <a:r>
+              <a:rPr lang="en-US" sz="1400" b="1" dirty="0">
+                <a:solidFill>
+                  <a:srgbClr val="FFFFFF"/>
+                </a:solidFill>
+                <a:latin typeface="Calibri" pitchFamily="34" charset="0"/>
+                <a:ea typeface="Calibri" pitchFamily="34" charset="-122"/>
+                <a:cs typeface="Calibri" pitchFamily="34" charset="-120"/>
+              </a:rPr>
+              <a:t>2</a:t>
+            </a:r>
+            <a:endParaRPr lang="en-US" sz="1400" dirty="0"/>
+          </a:p>
+        </p:txBody>
+      </p:sp>
+      <p:sp>
+        <p:nvSpPr>
+          <p:cNvPr id="12" name="Text 10"/>
+          <p:cNvSpPr/>
+          <p:nvPr/>
+        </p:nvSpPr>
+        <p:spPr>
+          <a:xfrm>
+            <a:off x="1645920" y="3310128"/>
+            <a:ext cx="9692640" cy="329184"/>
+          </a:xfrm>
+          <a:prstGeom prst="rect">
+            <a:avLst/>
+          </a:prstGeom>
+          <a:noFill/>
+          <a:ln/>
+        </p:spPr>
+        <p:txBody>
+          <a:bodyPr wrap="square" lIns="0" tIns="0" rIns="0" bIns="0" rtlCol="0" anchor="ctr"/>
+          <a:lstStyle/>
+          <a:p>
+            <a:pPr indent="0" marL="0">
+              <a:buNone/>
+            </a:pPr>
+            <a:r>
+              <a:rPr lang="en-US" sz="1700" b="1" dirty="0">
+                <a:solidFill>
+                  <a:srgbClr val="13272B"/>
+                </a:solidFill>
+                <a:latin typeface="Calibri" pitchFamily="34" charset="0"/>
+                <a:ea typeface="Calibri" pitchFamily="34" charset="-122"/>
+                <a:cs typeface="Calibri" pitchFamily="34" charset="-120"/>
+              </a:rPr>
+              <a:t>Postgres plans it before it runs</a:t>
+            </a:r>
+            <a:endParaRPr lang="en-US" sz="1700" dirty="0"/>
+          </a:p>
+        </p:txBody>
+      </p:sp>
+      <p:sp>
+        <p:nvSpPr>
+          <p:cNvPr id="13" name="Text 11"/>
+          <p:cNvSpPr/>
+          <p:nvPr/>
+        </p:nvSpPr>
+        <p:spPr>
+          <a:xfrm>
+            <a:off x="1645920" y="3657600"/>
+            <a:ext cx="9692640" cy="402336"/>
+          </a:xfrm>
+          <a:prstGeom prst="rect">
+            <a:avLst/>
+          </a:prstGeom>
+          <a:noFill/>
+          <a:ln/>
+        </p:spPr>
+        <p:txBody>
+          <a:bodyPr wrap="square" lIns="0" tIns="0" rIns="0" bIns="0" rtlCol="0" anchor="ctr"/>
+          <a:lstStyle/>
+          <a:p>
+            <a:pPr indent="0" marL="0">
+              <a:buNone/>
+            </a:pPr>
+            <a:r>
+              <a:rPr lang="en-US" sz="1350" dirty="0">
+                <a:solidFill>
+                  <a:srgbClr val="5C7378"/>
+                </a:solidFill>
+                <a:latin typeface="Calibri" pitchFamily="34" charset="0"/>
+                <a:ea typeface="Calibri" pitchFamily="34" charset="-122"/>
+                <a:cs typeface="Calibri" pitchFamily="34" charset="-120"/>
+              </a:rPr>
+              <a:t>EXPLAIN goes first. A query that will not plan never executes.</a:t>
+            </a:r>
+            <a:endParaRPr lang="en-US" sz="1350" dirty="0"/>
+          </a:p>
+        </p:txBody>
+      </p:sp>
+      <p:sp>
+        <p:nvSpPr>
+          <p:cNvPr id="14" name="Shape 12"/>
+          <p:cNvSpPr/>
+          <p:nvPr/>
+        </p:nvSpPr>
+        <p:spPr>
+          <a:xfrm>
+            <a:off x="640080" y="4251960"/>
+            <a:ext cx="10881360" cy="960120"/>
+          </a:xfrm>
+          <a:prstGeom prst="roundRect">
+            <a:avLst>
+              <a:gd name="adj" fmla="val 5882"/>
+            </a:avLst>
+          </a:prstGeom>
+          <a:solidFill>
+            <a:srgbClr val="F4F8F8"/>
+          </a:solidFill>
+          <a:ln w="12700">
+            <a:solidFill>
+              <a:srgbClr val="DCE6E7"/>
+            </a:solidFill>
+            <a:prstDash val="solid"/>
+          </a:ln>
+        </p:spPr>
+      </p:sp>
+      <p:sp>
+        <p:nvSpPr>
+          <p:cNvPr id="15" name="Shape 13"/>
+          <p:cNvSpPr/>
+          <p:nvPr/>
+        </p:nvSpPr>
+        <p:spPr>
+          <a:xfrm>
+            <a:off x="932688" y="4498848"/>
+            <a:ext cx="475488" cy="475488"/>
+          </a:xfrm>
+          <a:prstGeom prst="ellipse">
+            <a:avLst/>
+          </a:prstGeom>
+          <a:solidFill>
+            <a:srgbClr val="028090"/>
+          </a:solidFill>
+          <a:ln/>
+        </p:spPr>
+      </p:sp>
+      <p:sp>
+        <p:nvSpPr>
+          <p:cNvPr id="16" name="Text 14"/>
+          <p:cNvSpPr/>
+          <p:nvPr/>
+        </p:nvSpPr>
+        <p:spPr>
+          <a:xfrm>
+            <a:off x="932688" y="4498848"/>
+            <a:ext cx="475488" cy="475488"/>
+          </a:xfrm>
+          <a:prstGeom prst="rect">
+            <a:avLst/>
+          </a:prstGeom>
+          <a:noFill/>
+          <a:ln/>
+        </p:spPr>
+        <p:txBody>
+          <a:bodyPr wrap="square" lIns="0" tIns="0" rIns="0" bIns="0" rtlCol="0" anchor="ctr"/>
+          <a:lstStyle/>
+          <a:p>
+            <a:pPr algn="ctr" indent="0" marL="0">
+              <a:buNone/>
+            </a:pPr>
+            <a:r>
+              <a:rPr lang="en-US" sz="1400" b="1" dirty="0">
+                <a:solidFill>
+                  <a:srgbClr val="FFFFFF"/>
+                </a:solidFill>
+                <a:latin typeface="Calibri" pitchFamily="34" charset="0"/>
+                <a:ea typeface="Calibri" pitchFamily="34" charset="-122"/>
+                <a:cs typeface="Calibri" pitchFamily="34" charset="-120"/>
+              </a:rPr>
+              <a:t>3</a:t>
+            </a:r>
+            <a:endParaRPr lang="en-US" sz="1400" dirty="0"/>
+          </a:p>
+        </p:txBody>
+      </p:sp>
+      <p:sp>
+        <p:nvSpPr>
+          <p:cNvPr id="17" name="Text 15"/>
+          <p:cNvSpPr/>
+          <p:nvPr/>
+        </p:nvSpPr>
+        <p:spPr>
+          <a:xfrm>
+            <a:off x="1645920" y="4361688"/>
+            <a:ext cx="9692640" cy="329184"/>
+          </a:xfrm>
+          <a:prstGeom prst="rect">
+            <a:avLst/>
+          </a:prstGeom>
+          <a:noFill/>
+          <a:ln/>
+        </p:spPr>
+        <p:txBody>
+          <a:bodyPr wrap="square" lIns="0" tIns="0" rIns="0" bIns="0" rtlCol="0" anchor="ctr"/>
+          <a:lstStyle/>
+          <a:p>
+            <a:pPr indent="0" marL="0">
+              <a:buNone/>
+            </a:pPr>
+            <a:r>
+              <a:rPr lang="en-US" sz="1700" b="1" dirty="0">
+                <a:solidFill>
+                  <a:srgbClr val="13272B"/>
+                </a:solidFill>
+                <a:latin typeface="Calibri" pitchFamily="34" charset="0"/>
+                <a:ea typeface="Calibri" pitchFamily="34" charset="-122"/>
+                <a:cs typeface="Calibri" pitchFamily="34" charset="-120"/>
+              </a:rPr>
+              <a:t>READ ONLY · 10-second timeout · 200-row cap</a:t>
+            </a:r>
+            <a:endParaRPr lang="en-US" sz="1700" dirty="0"/>
+          </a:p>
+        </p:txBody>
+      </p:sp>
+      <p:sp>
+        <p:nvSpPr>
+          <p:cNvPr id="18" name="Text 16"/>
+          <p:cNvSpPr/>
+          <p:nvPr/>
+        </p:nvSpPr>
+        <p:spPr>
+          <a:xfrm>
+            <a:off x="1645920" y="4709160"/>
+            <a:ext cx="9692640" cy="402336"/>
+          </a:xfrm>
+          <a:prstGeom prst="rect">
+            <a:avLst/>
+          </a:prstGeom>
+          <a:noFill/>
+          <a:ln/>
+        </p:spPr>
+        <p:txBody>
+          <a:bodyPr wrap="square" lIns="0" tIns="0" rIns="0" bIns="0" rtlCol="0" anchor="ctr"/>
+          <a:lstStyle/>
+          <a:p>
+            <a:pPr indent="0" marL="0">
+              <a:buNone/>
+            </a:pPr>
+            <a:r>
+              <a:rPr lang="en-US" sz="1350" dirty="0">
+                <a:solidFill>
+                  <a:srgbClr val="5C7378"/>
+                </a:solidFill>
+                <a:latin typeface="Calibri" pitchFamily="34" charset="0"/>
+                <a:ea typeface="Calibri" pitchFamily="34" charset="-122"/>
+                <a:cs typeface="Calibri" pitchFamily="34" charset="-120"/>
+              </a:rPr>
+              <a:t>The transaction cannot write even if the guard were wrong about the string.</a:t>
+            </a:r>
+            <a:endParaRPr lang="en-US" sz="1350" dirty="0"/>
+          </a:p>
+        </p:txBody>
+      </p:sp>
+      <p:sp>
+        <p:nvSpPr>
+          <p:cNvPr id="19" name="Text lead"/>
+          <p:cNvSpPr/>
+          <p:nvPr/>
+        </p:nvSpPr>
+        <p:spPr>
+          <a:xfrm>
+            <a:off x="640080" y="1627632"/>
+            <a:ext cx="10881360" cy="457200"/>
+          </a:xfrm>
+          <a:prstGeom prst="rect">
+            <a:avLst/>
+          </a:prstGeom>
+          <a:noFill/>
+          <a:ln/>
+        </p:spPr>
+        <p:txBody>
+          <a:bodyPr wrap="square" lIns="0" tIns="0" rIns="0" bIns="0" rtlCol="0" anchor="ctr"/>
+          <a:lstStyle/>
+          <a:p>
+            <a:pPr indent="0" marL="0">
+              <a:buNone/>
+            </a:pPr>
+            <a:r>
+              <a:rPr lang="en-US" sz="1500" dirty="0">
+                <a:solidFill>
+                  <a:srgbClr val="5C7378"/>
+                </a:solidFill>
+                <a:latin typeface="Calibri" pitchFamily="34" charset="0"/>
+                <a:ea typeface="Calibri" pitchFamily="34" charset="-122"/>
+                <a:cs typeface="Calibri" pitchFamily="34" charset="-120"/>
+              </a:rPr>
+              <a:t>A question typed in English. The model's output is now a string that runs against the production database.</a:t>
+            </a:r>
+            <a:endParaRPr lang="en-US" sz="1500" dirty="0"/>
+          </a:p>
+        </p:txBody>
+      </p:sp>
+      <p:sp>
+        <p:nvSpPr>
+          <p:cNvPr id="20" name="Shape 12 d4"/>
+          <p:cNvSpPr/>
+          <p:nvPr/>
+        </p:nvSpPr>
+        <p:spPr>
+          <a:xfrm>
+            <a:off x="640080" y="5303520"/>
+            <a:ext cx="10881360" cy="960120"/>
+          </a:xfrm>
+          <a:prstGeom prst="roundRect">
+            <a:avLst>
+              <a:gd name="adj" fmla="val 5882"/>
+            </a:avLst>
+          </a:prstGeom>
+          <a:solidFill>
+            <a:srgbClr val="F4F8F8"/>
+          </a:solidFill>
+          <a:ln w="12700">
+            <a:solidFill>
+              <a:srgbClr val="DCE6E7"/>
+            </a:solidFill>
+            <a:prstDash val="solid"/>
+          </a:ln>
+        </p:spPr>
+      </p:sp>
+      <p:sp>
+        <p:nvSpPr>
+          <p:cNvPr id="21" name="Shape 13 d4"/>
+          <p:cNvSpPr/>
+          <p:nvPr/>
+        </p:nvSpPr>
+        <p:spPr>
+          <a:xfrm>
+            <a:off x="932688" y="5550408"/>
+            <a:ext cx="475488" cy="475488"/>
+          </a:xfrm>
+          <a:prstGeom prst="ellipse">
+            <a:avLst/>
+          </a:prstGeom>
+          <a:solidFill>
+            <a:srgbClr val="028090"/>
+          </a:solidFill>
+          <a:ln/>
+        </p:spPr>
+      </p:sp>
+      <p:sp>
+        <p:nvSpPr>
+          <p:cNvPr id="22" name="Text 14 d4"/>
+          <p:cNvSpPr/>
+          <p:nvPr/>
+        </p:nvSpPr>
+        <p:spPr>
+          <a:xfrm>
+            <a:off x="932688" y="5550408"/>
+            <a:ext cx="475488" cy="475488"/>
+          </a:xfrm>
+          <a:prstGeom prst="rect">
+            <a:avLst/>
+          </a:prstGeom>
+          <a:noFill/>
+          <a:ln/>
+        </p:spPr>
+        <p:txBody>
+          <a:bodyPr wrap="square" lIns="0" tIns="0" rIns="0" bIns="0" rtlCol="0" anchor="ctr"/>
+          <a:lstStyle/>
+          <a:p>
+            <a:pPr algn="ctr" indent="0" marL="0">
+              <a:buNone/>
+            </a:pPr>
+            <a:r>
+              <a:rPr lang="en-US" sz="1400" b="1" dirty="0">
+                <a:solidFill>
+                  <a:srgbClr val="FFFFFF"/>
+                </a:solidFill>
+                <a:latin typeface="Calibri" pitchFamily="34" charset="0"/>
+                <a:ea typeface="Calibri" pitchFamily="34" charset="-122"/>
+                <a:cs typeface="Calibri" pitchFamily="34" charset="-120"/>
+              </a:rPr>
+              <a:t>4</a:t>
+            </a:r>
+            <a:endParaRPr lang="en-US" sz="1400" dirty="0"/>
+          </a:p>
+        </p:txBody>
+      </p:sp>
+      <p:sp>
+        <p:nvSpPr>
+          <p:cNvPr id="23" name="Text 15 d4"/>
+          <p:cNvSpPr/>
+          <p:nvPr/>
+        </p:nvSpPr>
+        <p:spPr>
+          <a:xfrm>
+            <a:off x="1645920" y="5413248"/>
+            <a:ext cx="9692640" cy="329184"/>
+          </a:xfrm>
+          <a:prstGeom prst="rect">
+            <a:avLst/>
+          </a:prstGeom>
+          <a:noFill/>
+          <a:ln/>
+        </p:spPr>
+        <p:txBody>
+          <a:bodyPr wrap="square" lIns="0" tIns="0" rIns="0" bIns="0" rtlCol="0" anchor="ctr"/>
+          <a:lstStyle/>
+          <a:p>
+            <a:pPr indent="0" marL="0">
+              <a:buNone/>
+            </a:pPr>
+            <a:r>
+              <a:rPr lang="en-US" sz="1700" b="1" dirty="0">
+                <a:solidFill>
+                  <a:srgbClr val="13272B"/>
+                </a:solidFill>
+                <a:latin typeface="Calibri" pitchFamily="34" charset="0"/>
+                <a:ea typeface="Calibri" pitchFamily="34" charset="-122"/>
+                <a:cs typeface="Calibri" pitchFamily="34" charset="-120"/>
+              </a:rPr>
+              <a:t>A branch account is scoped exactly as the ORM scopes it</a:t>
+            </a:r>
+            <a:endParaRPr lang="en-US" sz="1700" dirty="0"/>
+          </a:p>
+        </p:txBody>
+      </p:sp>
+      <p:sp>
+        <p:nvSpPr>
+          <p:cNvPr id="24" name="Text 16 d4"/>
+          <p:cNvSpPr/>
+          <p:nvPr/>
+        </p:nvSpPr>
+        <p:spPr>
+          <a:xfrm>
+            <a:off x="1645920" y="5760720"/>
+            <a:ext cx="9692640" cy="402336"/>
+          </a:xfrm>
+          <a:prstGeom prst="rect">
+            <a:avLst/>
+          </a:prstGeom>
+          <a:noFill/>
+          <a:ln/>
+        </p:spPr>
+        <p:txBody>
+          <a:bodyPr wrap="square" lIns="0" tIns="0" rIns="0" bIns="0" rtlCol="0" anchor="ctr"/>
+          <a:lstStyle/>
+          <a:p>
+            <a:pPr indent="0" marL="0">
+              <a:buNone/>
+            </a:pPr>
+            <a:r>
+              <a:rPr lang="en-US" sz="1350" dirty="0">
+                <a:solidFill>
+                  <a:srgbClr val="5C7378"/>
+                </a:solidFill>
+                <a:latin typeface="Calibri" pitchFamily="34" charset="0"/>
+                <a:ea typeface="Calibri" pitchFamily="34" charset="-122"/>
+                <a:cs typeface="Calibri" pitchFamily="34" charset="-120"/>
+              </a:rPr>
+              <a:t>The same warehouse list every other endpoint uses, injected into the query.</a:t>
+            </a:r>
+            <a:endParaRPr lang="en-US" sz="1350" dirty="0"/>
+          </a:p>
+        </p:txBody>
+      </p:sp>
+    </p:spTree>
+  </p:cSld>
+  <p:clrMapOvr>
+    <a:masterClrMapping/>
+  </p:clrMapOvr>
+</p:sld>
+</file>
+
+<file path=ppt/slides/slide13.xml><?xml version="1.0" encoding="utf-8"?>
+<p:sld xmlns:a="http://schemas.openxmlformats.org/drawingml/2006/main" xmlns:r="http://schemas.openxmlformats.org/officeDocument/2006/relationships" xmlns:p="http://schemas.openxmlformats.org/presentationml/2006/main">
+  <p:cSld name="Slide 14">
+    <p:bg>
+      <p:bgPr>
+        <a:solidFill>
+          <a:srgbClr val="FFFFFF"/>
+        </a:solidFill>
+      </p:bgPr>
+    </p:bg>
+    <p:spTree>
+      <p:nvGrpSpPr>
+        <p:cNvPr id="1" name=""/>
+        <p:cNvGrpSpPr/>
+        <p:nvPr/>
+      </p:nvGrpSpPr>
+      <p:grpSpPr>
+        <a:xfrm>
+          <a:off x="0" y="0"/>
+          <a:ext cx="0" cy="0"/>
+          <a:chOff x="0" y="0"/>
+          <a:chExt cx="0" cy="0"/>
+        </a:xfrm>
+      </p:grpSpPr>
+      <p:sp>
+        <p:nvSpPr>
+          <p:cNvPr id="2" name="Text 0"/>
+          <p:cNvSpPr/>
+          <p:nvPr/>
+        </p:nvSpPr>
+        <p:spPr>
+          <a:xfrm>
+            <a:off x="640080" y="384048"/>
+            <a:ext cx="7315200" cy="256032"/>
+          </a:xfrm>
+          <a:prstGeom prst="rect">
+            <a:avLst/>
+          </a:prstGeom>
+          <a:noFill/>
+          <a:ln/>
+        </p:spPr>
+        <p:txBody>
+          <a:bodyPr wrap="square" lIns="0" tIns="0" rIns="0" bIns="0" rtlCol="0" anchor="ctr"/>
+          <a:lstStyle/>
+          <a:p>
+            <a:pPr indent="0" marL="0">
+              <a:buNone/>
+            </a:pPr>
+            <a:r>
+              <a:rPr lang="en-US" sz="1200" b="1" spc="200" kern="0" dirty="0">
+                <a:solidFill>
+                  <a:srgbClr val="00A896"/>
+                </a:solidFill>
+                <a:latin typeface="Calibri" pitchFamily="34" charset="0"/>
+                <a:ea typeface="Calibri" pitchFamily="34" charset="-122"/>
+                <a:cs typeface="Calibri" pitchFamily="34" charset="-120"/>
+              </a:rPr>
+              <a:t>BENCHMARK</a:t>
+            </a:r>
+            <a:endParaRPr lang="en-US" sz="1200" dirty="0"/>
+          </a:p>
+        </p:txBody>
+      </p:sp>
+      <p:sp>
+        <p:nvSpPr>
+          <p:cNvPr id="3" name="Text 1"/>
+          <p:cNvSpPr/>
+          <p:nvPr/>
+        </p:nvSpPr>
+        <p:spPr>
+          <a:xfrm>
+            <a:off x="640080" y="658368"/>
+            <a:ext cx="10881360" cy="777240"/>
+          </a:xfrm>
+          <a:prstGeom prst="rect">
+            <a:avLst/>
+          </a:prstGeom>
+          <a:noFill/>
+          <a:ln/>
+        </p:spPr>
+        <p:txBody>
+          <a:bodyPr wrap="square" lIns="0" tIns="0" rIns="0" bIns="0" rtlCol="0" anchor="ctr"/>
+          <a:lstStyle/>
+          <a:p>
+            <a:pPr indent="0" marL="0">
+              <a:buNone/>
+            </a:pPr>
+            <a:r>
+              <a:rPr lang="en-US" sz="3600" b="1" dirty="0">
+                <a:solidFill>
+                  <a:srgbClr val="13272B"/>
+                </a:solidFill>
+                <a:latin typeface="Cambria" pitchFamily="34" charset="0"/>
+                <a:ea typeface="Cambria" pitchFamily="34" charset="-122"/>
+                <a:cs typeface="Cambria" pitchFamily="34" charset="-120"/>
+              </a:rPr>
+              <a:t>Ask, measured honestly</a:t>
+            </a:r>
+            <a:endParaRPr lang="en-US" sz="3600" dirty="0"/>
+          </a:p>
+        </p:txBody>
+      </p:sp>
+      <p:sp>
+        <p:nvSpPr>
+          <p:cNvPr id="4" name="Shape 2"/>
+          <p:cNvSpPr/>
+          <p:nvPr/>
+        </p:nvSpPr>
+        <p:spPr>
+          <a:xfrm>
+            <a:off x="640080" y="2267712"/>
+            <a:ext cx="402336" cy="402336"/>
+          </a:xfrm>
+          <a:prstGeom prst="ellipse">
+            <a:avLst/>
+          </a:prstGeom>
+          <a:solidFill>
+            <a:srgbClr val="C77700"/>
+          </a:solidFill>
+          <a:ln/>
+        </p:spPr>
+      </p:sp>
+      <p:sp>
+        <p:nvSpPr>
+          <p:cNvPr id="5" name="Text 3"/>
+          <p:cNvSpPr/>
+          <p:nvPr/>
+        </p:nvSpPr>
+        <p:spPr>
+          <a:xfrm>
+            <a:off x="640080" y="2267712"/>
+            <a:ext cx="402336" cy="402336"/>
+          </a:xfrm>
+          <a:prstGeom prst="rect">
+            <a:avLst/>
+          </a:prstGeom>
+          <a:noFill/>
+          <a:ln/>
+        </p:spPr>
+        <p:txBody>
+          <a:bodyPr wrap="square" lIns="0" tIns="0" rIns="0" bIns="0" rtlCol="0" anchor="ctr"/>
+          <a:lstStyle/>
+          <a:p>
+            <a:pPr algn="ctr" indent="0" marL="0">
+              <a:buNone/>
+            </a:pPr>
+            <a:r>
+              <a:rPr lang="en-US" sz="1400" b="1" dirty="0">
+                <a:solidFill>
+                  <a:srgbClr val="FFFFFF"/>
+                </a:solidFill>
+                <a:latin typeface="Calibri" pitchFamily="34" charset="0"/>
+                <a:ea typeface="Calibri" pitchFamily="34" charset="-122"/>
+                <a:cs typeface="Calibri" pitchFamily="34" charset="-120"/>
+              </a:rPr>
+              <a:t>!</a:t>
+            </a:r>
+            <a:endParaRPr lang="en-US" sz="1400" dirty="0"/>
+          </a:p>
+        </p:txBody>
+      </p:sp>
+      <p:sp>
+        <p:nvSpPr>
+          <p:cNvPr id="6" name="Text 4"/>
+          <p:cNvSpPr/>
+          <p:nvPr/>
+        </p:nvSpPr>
+        <p:spPr>
+          <a:xfrm>
+            <a:off x="1261872" y="2221992"/>
+            <a:ext cx="10332720" cy="329184"/>
+          </a:xfrm>
+          <a:prstGeom prst="rect">
+            <a:avLst/>
+          </a:prstGeom>
+          <a:noFill/>
+          <a:ln/>
+        </p:spPr>
+        <p:txBody>
+          <a:bodyPr wrap="square" lIns="0" tIns="0" rIns="0" bIns="0" rtlCol="0" anchor="ctr"/>
+          <a:lstStyle/>
+          <a:p>
+            <a:pPr indent="0" marL="0">
+              <a:buNone/>
+            </a:pPr>
+            <a:r>
+              <a:rPr lang="en-US" sz="1600" b="1" dirty="0">
+                <a:solidFill>
+                  <a:srgbClr val="13272B"/>
+                </a:solidFill>
+                <a:latin typeface="Calibri" pitchFamily="34" charset="0"/>
+                <a:ea typeface="Calibri" pitchFamily="34" charset="-122"/>
+                <a:cs typeface="Calibri" pitchFamily="34" charset="-120"/>
+              </a:rPr>
+              <a:t>Who owes us money?</a:t>
+            </a:r>
+            <a:endParaRPr lang="en-US" sz="1600" dirty="0"/>
+          </a:p>
+        </p:txBody>
+      </p:sp>
+      <p:sp>
+        <p:nvSpPr>
+          <p:cNvPr id="7" name="Text 5"/>
+          <p:cNvSpPr/>
+          <p:nvPr/>
+        </p:nvSpPr>
+        <p:spPr>
+          <a:xfrm>
+            <a:off x="1261872" y="2532888"/>
+            <a:ext cx="10332720" cy="310896"/>
+          </a:xfrm>
+          <a:prstGeom prst="rect">
+            <a:avLst/>
+          </a:prstGeom>
+          <a:noFill/>
+          <a:ln/>
+        </p:spPr>
+        <p:txBody>
+          <a:bodyPr wrap="square" lIns="0" tIns="0" rIns="0" bIns="0" rtlCol="0" anchor="ctr"/>
+          <a:lstStyle/>
+          <a:p>
+            <a:pPr indent="0" marL="0">
+              <a:buNone/>
+            </a:pPr>
+            <a:r>
+              <a:rPr lang="en-US" sz="1300" dirty="0">
+                <a:solidFill>
+                  <a:srgbClr val="5C7378"/>
+                </a:solidFill>
+                <a:latin typeface="Calibri" pitchFamily="34" charset="0"/>
+                <a:ea typeface="Calibri" pitchFamily="34" charset="-122"/>
+                <a:cs typeface="Calibri" pitchFamily="34" charset="-120"/>
+              </a:rPr>
+              <a:t>It said ₹72,610. There is no payments table — that number was orders, not debt.</a:t>
+            </a:r>
+            <a:endParaRPr lang="en-US" sz="1300" dirty="0"/>
+          </a:p>
+        </p:txBody>
+      </p:sp>
+      <p:sp>
+        <p:nvSpPr>
+          <p:cNvPr id="8" name="Shape 6"/>
+          <p:cNvSpPr/>
+          <p:nvPr/>
+        </p:nvSpPr>
+        <p:spPr>
+          <a:xfrm>
+            <a:off x="640080" y="3154680"/>
+            <a:ext cx="402336" cy="402336"/>
+          </a:xfrm>
+          <a:prstGeom prst="ellipse">
+            <a:avLst/>
+          </a:prstGeom>
+          <a:solidFill>
+            <a:srgbClr val="C77700"/>
+          </a:solidFill>
+          <a:ln/>
+        </p:spPr>
+      </p:sp>
+      <p:sp>
+        <p:nvSpPr>
+          <p:cNvPr id="9" name="Text 7"/>
+          <p:cNvSpPr/>
+          <p:nvPr/>
+        </p:nvSpPr>
+        <p:spPr>
+          <a:xfrm>
+            <a:off x="640080" y="3154680"/>
+            <a:ext cx="402336" cy="402336"/>
+          </a:xfrm>
+          <a:prstGeom prst="rect">
+            <a:avLst/>
+          </a:prstGeom>
+          <a:noFill/>
+          <a:ln/>
+        </p:spPr>
+        <p:txBody>
+          <a:bodyPr wrap="square" lIns="0" tIns="0" rIns="0" bIns="0" rtlCol="0" anchor="ctr"/>
+          <a:lstStyle/>
+          <a:p>
+            <a:pPr algn="ctr" indent="0" marL="0">
+              <a:buNone/>
+            </a:pPr>
+            <a:r>
+              <a:rPr lang="en-US" sz="1400" b="1" dirty="0">
+                <a:solidFill>
+                  <a:srgbClr val="FFFFFF"/>
+                </a:solidFill>
+                <a:latin typeface="Calibri" pitchFamily="34" charset="0"/>
+                <a:ea typeface="Calibri" pitchFamily="34" charset="-122"/>
+                <a:cs typeface="Calibri" pitchFamily="34" charset="-120"/>
+              </a:rPr>
+              <a:t>!</a:t>
+            </a:r>
+            <a:endParaRPr lang="en-US" sz="1400" dirty="0"/>
+          </a:p>
+        </p:txBody>
+      </p:sp>
+      <p:sp>
+        <p:nvSpPr>
+          <p:cNvPr id="10" name="Text 8"/>
+          <p:cNvSpPr/>
+          <p:nvPr/>
+        </p:nvSpPr>
+        <p:spPr>
+          <a:xfrm>
+            <a:off x="1261872" y="3108960"/>
+            <a:ext cx="10332720" cy="329184"/>
+          </a:xfrm>
+          <a:prstGeom prst="rect">
+            <a:avLst/>
+          </a:prstGeom>
+          <a:noFill/>
+          <a:ln/>
+        </p:spPr>
+        <p:txBody>
+          <a:bodyPr wrap="square" lIns="0" tIns="0" rIns="0" bIns="0" rtlCol="0" anchor="ctr"/>
+          <a:lstStyle/>
+          <a:p>
+            <a:pPr indent="0" marL="0">
+              <a:buNone/>
+            </a:pPr>
+            <a:r>
+              <a:rPr lang="en-US" sz="1600" b="1" dirty="0">
+                <a:solidFill>
+                  <a:srgbClr val="13272B"/>
+                </a:solidFill>
+                <a:latin typeface="Calibri" pitchFamily="34" charset="0"/>
+                <a:ea typeface="Calibri" pitchFamily="34" charset="-122"/>
+                <a:cs typeface="Calibri" pitchFamily="34" charset="-120"/>
+              </a:rPr>
+              <a:t>Top sellers by revenue</a:t>
+            </a:r>
+            <a:endParaRPr lang="en-US" sz="1600" dirty="0"/>
+          </a:p>
+        </p:txBody>
+      </p:sp>
+      <p:sp>
+        <p:nvSpPr>
+          <p:cNvPr id="11" name="Text 9"/>
+          <p:cNvSpPr/>
+          <p:nvPr/>
+        </p:nvSpPr>
+        <p:spPr>
+          <a:xfrm>
+            <a:off x="1261872" y="3419856"/>
+            <a:ext cx="10332720" cy="310896"/>
+          </a:xfrm>
+          <a:prstGeom prst="rect">
+            <a:avLst/>
+          </a:prstGeom>
+          <a:noFill/>
+          <a:ln/>
+        </p:spPr>
+        <p:txBody>
+          <a:bodyPr wrap="square" lIns="0" tIns="0" rIns="0" bIns="0" rtlCol="0" anchor="ctr"/>
+          <a:lstStyle/>
+          <a:p>
+            <a:pPr indent="0" marL="0">
+              <a:buNone/>
+            </a:pPr>
+            <a:r>
+              <a:rPr lang="en-US" sz="1300" dirty="0">
+                <a:solidFill>
+                  <a:srgbClr val="5C7378"/>
+                </a:solidFill>
+                <a:latin typeface="Calibri" pitchFamily="34" charset="0"/>
+                <a:ea typeface="Calibri" pitchFamily="34" charset="-122"/>
+                <a:cs typeface="Calibri" pitchFamily="34" charset="-120"/>
+              </a:rPr>
+              <a:t>It returned cost of goods. No selling price is recorded anywhere in the ledger.</a:t>
+            </a:r>
+            <a:endParaRPr lang="en-US" sz="1300" dirty="0"/>
+          </a:p>
+        </p:txBody>
+      </p:sp>
+      <p:sp>
+        <p:nvSpPr>
+          <p:cNvPr id="12" name="Shape 10"/>
+          <p:cNvSpPr/>
+          <p:nvPr/>
+        </p:nvSpPr>
+        <p:spPr>
+          <a:xfrm>
+            <a:off x="640080" y="4041648"/>
+            <a:ext cx="402336" cy="402336"/>
+          </a:xfrm>
+          <a:prstGeom prst="ellipse">
+            <a:avLst/>
+          </a:prstGeom>
+          <a:solidFill>
+            <a:srgbClr val="C77700"/>
+          </a:solidFill>
+          <a:ln/>
+        </p:spPr>
+      </p:sp>
+      <p:sp>
+        <p:nvSpPr>
+          <p:cNvPr id="13" name="Text 11"/>
+          <p:cNvSpPr/>
+          <p:nvPr/>
+        </p:nvSpPr>
+        <p:spPr>
+          <a:xfrm>
+            <a:off x="640080" y="4041648"/>
+            <a:ext cx="402336" cy="402336"/>
+          </a:xfrm>
+          <a:prstGeom prst="rect">
+            <a:avLst/>
+          </a:prstGeom>
+          <a:noFill/>
+          <a:ln/>
+        </p:spPr>
+        <p:txBody>
+          <a:bodyPr wrap="square" lIns="0" tIns="0" rIns="0" bIns="0" rtlCol="0" anchor="ctr"/>
+          <a:lstStyle/>
+          <a:p>
+            <a:pPr algn="ctr" indent="0" marL="0">
+              <a:buNone/>
+            </a:pPr>
+            <a:r>
+              <a:rPr lang="en-US" sz="1400" b="1" dirty="0">
+                <a:solidFill>
+                  <a:srgbClr val="FFFFFF"/>
+                </a:solidFill>
+                <a:latin typeface="Calibri" pitchFamily="34" charset="0"/>
+                <a:ea typeface="Calibri" pitchFamily="34" charset="-122"/>
+                <a:cs typeface="Calibri" pitchFamily="34" charset="-120"/>
+              </a:rPr>
+              <a:t>!</a:t>
+            </a:r>
+            <a:endParaRPr lang="en-US" sz="1400" dirty="0"/>
+          </a:p>
+        </p:txBody>
+      </p:sp>
+      <p:sp>
+        <p:nvSpPr>
+          <p:cNvPr id="14" name="Text 12"/>
+          <p:cNvSpPr/>
+          <p:nvPr/>
+        </p:nvSpPr>
+        <p:spPr>
+          <a:xfrm>
+            <a:off x="1261872" y="3995928"/>
+            <a:ext cx="10332720" cy="329184"/>
+          </a:xfrm>
+          <a:prstGeom prst="rect">
+            <a:avLst/>
+          </a:prstGeom>
+          <a:noFill/>
+          <a:ln/>
+        </p:spPr>
+        <p:txBody>
+          <a:bodyPr wrap="square" lIns="0" tIns="0" rIns="0" bIns="0" rtlCol="0" anchor="ctr"/>
+          <a:lstStyle/>
+          <a:p>
+            <a:pPr indent="0" marL="0">
+              <a:buNone/>
+            </a:pPr>
+            <a:r>
+              <a:rPr lang="en-US" sz="1600" b="1" dirty="0">
+                <a:solidFill>
+                  <a:srgbClr val="13272B"/>
+                </a:solidFill>
+                <a:latin typeface="Calibri" pitchFamily="34" charset="0"/>
+                <a:ea typeface="Calibri" pitchFamily="34" charset="-122"/>
+                <a:cs typeface="Calibri" pitchFamily="34" charset="-120"/>
+              </a:rPr>
+              <a:t>Which lots were recalled?</a:t>
+            </a:r>
+            <a:endParaRPr lang="en-US" sz="1600" dirty="0"/>
+          </a:p>
+        </p:txBody>
+      </p:sp>
+      <p:sp>
+        <p:nvSpPr>
+          <p:cNvPr id="15" name="Text 13"/>
+          <p:cNvSpPr/>
+          <p:nvPr/>
+        </p:nvSpPr>
+        <p:spPr>
+          <a:xfrm>
+            <a:off x="1261872" y="4306824"/>
+            <a:ext cx="10332720" cy="310896"/>
+          </a:xfrm>
+          <a:prstGeom prst="rect">
+            <a:avLst/>
+          </a:prstGeom>
+          <a:noFill/>
+          <a:ln/>
+        </p:spPr>
+        <p:txBody>
+          <a:bodyPr wrap="square" lIns="0" tIns="0" rIns="0" bIns="0" rtlCol="0" anchor="ctr"/>
+          <a:lstStyle/>
+          <a:p>
+            <a:pPr indent="0" marL="0">
+              <a:buNone/>
+            </a:pPr>
+            <a:r>
+              <a:rPr lang="en-US" sz="1300" dirty="0">
+                <a:solidFill>
+                  <a:srgbClr val="5C7378"/>
+                </a:solidFill>
+                <a:latin typeface="Calibri" pitchFamily="34" charset="0"/>
+                <a:ea typeface="Calibri" pitchFamily="34" charset="-122"/>
+                <a:cs typeface="Calibri" pitchFamily="34" charset="-120"/>
+              </a:rPr>
+              <a:t>It said none. There were two — the one answer a recall must never get wrong.</a:t>
+            </a:r>
+            <a:endParaRPr lang="en-US" sz="1300" dirty="0"/>
+          </a:p>
+        </p:txBody>
+      </p:sp>
+      <p:sp>
+        <p:nvSpPr>
+          <p:cNvPr id="16" name="Shape 14"/>
+          <p:cNvSpPr/>
+          <p:nvPr/>
+        </p:nvSpPr>
+        <p:spPr>
+          <a:xfrm>
+            <a:off x="640080" y="4928616"/>
+            <a:ext cx="402336" cy="402336"/>
+          </a:xfrm>
+          <a:prstGeom prst="ellipse">
+            <a:avLst/>
+          </a:prstGeom>
+          <a:solidFill>
+            <a:srgbClr val="C77700"/>
+          </a:solidFill>
+          <a:ln/>
+        </p:spPr>
+      </p:sp>
+      <p:sp>
+        <p:nvSpPr>
+          <p:cNvPr id="17" name="Text 15"/>
+          <p:cNvSpPr/>
+          <p:nvPr/>
+        </p:nvSpPr>
+        <p:spPr>
+          <a:xfrm>
+            <a:off x="640080" y="4928616"/>
+            <a:ext cx="402336" cy="402336"/>
+          </a:xfrm>
+          <a:prstGeom prst="rect">
+            <a:avLst/>
+          </a:prstGeom>
+          <a:noFill/>
+          <a:ln/>
+        </p:spPr>
+        <p:txBody>
+          <a:bodyPr wrap="square" lIns="0" tIns="0" rIns="0" bIns="0" rtlCol="0" anchor="ctr"/>
+          <a:lstStyle/>
+          <a:p>
+            <a:pPr algn="ctr" indent="0" marL="0">
+              <a:buNone/>
+            </a:pPr>
+            <a:r>
+              <a:rPr lang="en-US" sz="1400" b="1" dirty="0">
+                <a:solidFill>
+                  <a:srgbClr val="FFFFFF"/>
+                </a:solidFill>
+                <a:latin typeface="Calibri" pitchFamily="34" charset="0"/>
+                <a:ea typeface="Calibri" pitchFamily="34" charset="-122"/>
+                <a:cs typeface="Calibri" pitchFamily="34" charset="-120"/>
+              </a:rPr>
+              <a:t>!</a:t>
+            </a:r>
+            <a:endParaRPr lang="en-US" sz="1400" dirty="0"/>
+          </a:p>
+        </p:txBody>
+      </p:sp>
+      <p:sp>
+        <p:nvSpPr>
+          <p:cNvPr id="18" name="Text 16"/>
+          <p:cNvSpPr/>
+          <p:nvPr/>
+        </p:nvSpPr>
+        <p:spPr>
+          <a:xfrm>
+            <a:off x="1261872" y="4882896"/>
+            <a:ext cx="10332720" cy="329184"/>
+          </a:xfrm>
+          <a:prstGeom prst="rect">
+            <a:avLst/>
+          </a:prstGeom>
+          <a:noFill/>
+          <a:ln/>
+        </p:spPr>
+        <p:txBody>
+          <a:bodyPr wrap="square" lIns="0" tIns="0" rIns="0" bIns="0" rtlCol="0" anchor="ctr"/>
+          <a:lstStyle/>
+          <a:p>
+            <a:pPr indent="0" marL="0">
+              <a:buNone/>
+            </a:pPr>
+            <a:r>
+              <a:rPr lang="en-US" sz="1600" b="1" dirty="0">
+                <a:solidFill>
+                  <a:srgbClr val="13272B"/>
+                </a:solidFill>
+                <a:latin typeface="Calibri" pitchFamily="34" charset="0"/>
+                <a:ea typeface="Calibri" pitchFamily="34" charset="-122"/>
+                <a:cs typeface="Calibri" pitchFamily="34" charset="-120"/>
+              </a:rPr>
+              <a:t>What is our stock worth, per branch?</a:t>
+            </a:r>
+            <a:endParaRPr lang="en-US" sz="1600" dirty="0"/>
+          </a:p>
+        </p:txBody>
+      </p:sp>
+      <p:sp>
+        <p:nvSpPr>
+          <p:cNvPr id="19" name="Text 17"/>
+          <p:cNvSpPr/>
+          <p:nvPr/>
+        </p:nvSpPr>
+        <p:spPr>
+          <a:xfrm>
+            <a:off x="1261872" y="5193792"/>
+            <a:ext cx="10332720" cy="310896"/>
+          </a:xfrm>
+          <a:prstGeom prst="rect">
+            <a:avLst/>
+          </a:prstGeom>
+          <a:noFill/>
+          <a:ln/>
+        </p:spPr>
+        <p:txBody>
+          <a:bodyPr wrap="square" lIns="0" tIns="0" rIns="0" bIns="0" rtlCol="0" anchor="ctr"/>
+          <a:lstStyle/>
+          <a:p>
+            <a:pPr indent="0" marL="0">
+              <a:buNone/>
+            </a:pPr>
+            <a:r>
+              <a:rPr lang="en-US" sz="1300" dirty="0">
+                <a:solidFill>
+                  <a:srgbClr val="5C7378"/>
+                </a:solidFill>
+                <a:latin typeface="Calibri" pitchFamily="34" charset="0"/>
+                <a:ea typeface="Calibri" pitchFamily="34" charset="-122"/>
+                <a:cs typeface="Calibri" pitchFamily="34" charset="-120"/>
+              </a:rPr>
+              <a:t>It said ₹96 lakh. The basis the rest of the product uses gives ₹72 lakh.</a:t>
+            </a:r>
+            <a:endParaRPr lang="en-US" sz="1300" dirty="0"/>
+          </a:p>
+        </p:txBody>
+      </p:sp>
+      <p:sp>
+        <p:nvSpPr>
+          <p:cNvPr id="24" name="Text lead"/>
+          <p:cNvSpPr/>
+          <p:nvPr/>
+        </p:nvSpPr>
+        <p:spPr>
+          <a:xfrm>
+            <a:off x="640080" y="1627632"/>
+            <a:ext cx="10881360" cy="457200"/>
+          </a:xfrm>
+          <a:prstGeom prst="rect">
+            <a:avLst/>
+          </a:prstGeom>
+          <a:noFill/>
+          <a:ln/>
+        </p:spPr>
+        <p:txBody>
+          <a:bodyPr wrap="square" lIns="0" tIns="0" rIns="0" bIns="0" rtlCol="0" anchor="ctr"/>
+          <a:lstStyle/>
+          <a:p>
+            <a:pPr indent="0" marL="0">
+              <a:buNone/>
+            </a:pPr>
+            <a:r>
+              <a:rPr lang="en-US" sz="1500" dirty="0">
+                <a:solidFill>
+                  <a:srgbClr val="5C7378"/>
+                </a:solidFill>
+                <a:latin typeface="Calibri" pitchFamily="34" charset="0"/>
+                <a:ea typeface="Calibri" pitchFamily="34" charset="-122"/>
+                <a:cs typeface="Calibri" pitchFamily="34" charset="-120"/>
+              </a:rPr>
+              <a:t>Fifty questions, each checked against SQL written by hand. Nothing crashed — seven answers were wrong.</a:t>
+            </a:r>
+            <a:endParaRPr lang="en-US" sz="1500" dirty="0"/>
+          </a:p>
+        </p:txBody>
+      </p:sp>
+      <p:sp>
+        <p:nvSpPr>
+          <p:cNvPr id="25" name="Text footer"/>
+          <p:cNvSpPr/>
+          <p:nvPr/>
+        </p:nvSpPr>
+        <p:spPr>
+          <a:xfrm>
+            <a:off x="640080" y="5760720"/>
+            <a:ext cx="10881360" cy="457200"/>
+          </a:xfrm>
+          <a:prstGeom prst="rect">
+            <a:avLst/>
+          </a:prstGeom>
+          <a:noFill/>
+          <a:ln/>
+        </p:spPr>
+        <p:txBody>
+          <a:bodyPr wrap="square" lIns="0" tIns="0" rIns="0" bIns="0" rtlCol="0" anchor="ctr"/>
+          <a:lstStyle/>
+          <a:p>
+            <a:pPr indent="0" marL="0">
+              <a:buNone/>
+            </a:pPr>
+            <a:r>
+              <a:rPr lang="en-US" sz="1300" i="1" dirty="0">
+                <a:solidFill>
+                  <a:srgbClr val="5C7378"/>
+                </a:solidFill>
+                <a:latin typeface="Calibri" pitchFamily="34" charset="0"/>
+                <a:ea typeface="Calibri" pitchFamily="34" charset="-122"/>
+                <a:cs typeface="Calibri" pitchFamily="34" charset="-120"/>
+              </a:rPr>
+              <a:t>All seven are fixed and re-verified. The fix was never to the model — it was to what the model is told about this business.</a:t>
+            </a:r>
+            <a:endParaRPr lang="en-US" sz="1300" dirty="0"/>
+          </a:p>
+        </p:txBody>
+      </p:sp>
+    </p:spTree>
+  </p:cSld>
+  <p:clrMapOvr>
+    <a:masterClrMapping/>
+  </p:clrMapOvr>
+</p:sld>
+</file>
+
+<file path=ppt/slides/slide14.xml><?xml version="1.0" encoding="utf-8"?>
+<p:sld xmlns:a="http://schemas.openxmlformats.org/drawingml/2006/main" xmlns:r="http://schemas.openxmlformats.org/officeDocument/2006/relationships" xmlns:p="http://schemas.openxmlformats.org/presentationml/2006/main">
+  <p:cSld name="Slide 4">
+    <p:bg>
+      <p:bgPr>
+        <a:solidFill>
+          <a:srgbClr val="FFFFFF"/>
+        </a:solidFill>
+      </p:bgPr>
+    </p:bg>
+    <p:spTree>
+      <p:nvGrpSpPr>
+        <p:cNvPr id="1" name=""/>
+        <p:cNvGrpSpPr/>
+        <p:nvPr/>
+      </p:nvGrpSpPr>
+      <p:grpSpPr>
+        <a:xfrm>
+          <a:off x="0" y="0"/>
+          <a:ext cx="0" cy="0"/>
+          <a:chOff x="0" y="0"/>
+          <a:chExt cx="0" cy="0"/>
+        </a:xfrm>
+      </p:grpSpPr>
+      <p:sp>
+        <p:nvSpPr>
+          <p:cNvPr id="2" name="Text 0"/>
+          <p:cNvSpPr/>
+          <p:nvPr/>
+        </p:nvSpPr>
+        <p:spPr>
+          <a:xfrm>
+            <a:off x="640080" y="384048"/>
+            <a:ext cx="7315200" cy="256032"/>
+          </a:xfrm>
+          <a:prstGeom prst="rect">
+            <a:avLst/>
+          </a:prstGeom>
+          <a:noFill/>
+          <a:ln/>
+        </p:spPr>
+        <p:txBody>
+          <a:bodyPr wrap="square" lIns="0" tIns="0" rIns="0" bIns="0" rtlCol="0" anchor="ctr"/>
+          <a:lstStyle/>
+          <a:p>
+            <a:pPr indent="0" marL="0">
+              <a:buNone/>
+            </a:pPr>
+            <a:r>
+              <a:rPr lang="en-US" sz="1200" b="1" spc="200" kern="0" dirty="0">
+                <a:solidFill>
+                  <a:srgbClr val="00A896"/>
+                </a:solidFill>
+                <a:latin typeface="Calibri" pitchFamily="34" charset="0"/>
+                <a:ea typeface="Calibri" pitchFamily="34" charset="-122"/>
+                <a:cs typeface="Calibri" pitchFamily="34" charset="-120"/>
+              </a:rPr>
+              <a:t>REFUSAL</a:t>
+            </a:r>
+            <a:endParaRPr lang="en-US" sz="1200" dirty="0"/>
+          </a:p>
+        </p:txBody>
+      </p:sp>
+      <p:sp>
+        <p:nvSpPr>
+          <p:cNvPr id="3" name="Text 1"/>
+          <p:cNvSpPr/>
+          <p:nvPr/>
+        </p:nvSpPr>
+        <p:spPr>
+          <a:xfrm>
+            <a:off x="640080" y="658368"/>
+            <a:ext cx="10881360" cy="777240"/>
+          </a:xfrm>
+          <a:prstGeom prst="rect">
+            <a:avLst/>
+          </a:prstGeom>
+          <a:noFill/>
+          <a:ln/>
+        </p:spPr>
+        <p:txBody>
+          <a:bodyPr wrap="square" lIns="0" tIns="0" rIns="0" bIns="0" rtlCol="0" anchor="ctr"/>
+          <a:lstStyle/>
+          <a:p>
+            <a:pPr indent="0" marL="0">
+              <a:buNone/>
+            </a:pPr>
+            <a:r>
+              <a:rPr lang="en-US" sz="3600" b="1" dirty="0">
+                <a:solidFill>
+                  <a:srgbClr val="13272B"/>
+                </a:solidFill>
+                <a:latin typeface="Cambria" pitchFamily="34" charset="0"/>
+                <a:ea typeface="Cambria" pitchFamily="34" charset="-122"/>
+                <a:cs typeface="Cambria" pitchFamily="34" charset="-120"/>
+              </a:rPr>
+              <a:t>What Ask says when it cannot answer</a:t>
+            </a:r>
+            <a:endParaRPr lang="en-US" sz="3600" dirty="0"/>
+          </a:p>
+        </p:txBody>
+      </p:sp>
+      <p:sp>
+        <p:nvSpPr>
+          <p:cNvPr id="4" name="Shape 2"/>
+          <p:cNvSpPr/>
+          <p:nvPr/>
+        </p:nvSpPr>
+        <p:spPr>
+          <a:xfrm>
+            <a:off x="640080" y="1828800"/>
+            <a:ext cx="5029200" cy="914400"/>
+          </a:xfrm>
+          <a:prstGeom prst="roundRect">
+            <a:avLst>
+              <a:gd name="adj" fmla="val 8000"/>
+            </a:avLst>
+          </a:prstGeom>
+          <a:solidFill>
+            <a:srgbClr val="F4F8F8"/>
+          </a:solidFill>
+          <a:ln w="12700">
+            <a:solidFill>
+              <a:srgbClr val="DCE6E7"/>
+            </a:solidFill>
+            <a:prstDash val="solid"/>
+          </a:ln>
+        </p:spPr>
+      </p:sp>
+      <p:sp>
+        <p:nvSpPr>
+          <p:cNvPr id="5" name="Text 3"/>
+          <p:cNvSpPr/>
+          <p:nvPr/>
+        </p:nvSpPr>
+        <p:spPr>
+          <a:xfrm>
+            <a:off x="914400" y="1828800"/>
+            <a:ext cx="4480560" cy="914400"/>
+          </a:xfrm>
+          <a:prstGeom prst="rect">
+            <a:avLst/>
+          </a:prstGeom>
+          <a:noFill/>
+          <a:ln/>
+        </p:spPr>
+        <p:txBody>
+          <a:bodyPr wrap="square" lIns="0" tIns="0" rIns="0" bIns="0" rtlCol="0" anchor="ctr"/>
+          <a:lstStyle/>
+          <a:p>
+            <a:pPr indent="0" marL="0">
+              <a:buNone/>
+            </a:pPr>
+            <a:r>
+              <a:rPr lang="en-US" sz="1500" b="1" dirty="0">
+                <a:solidFill>
+                  <a:srgbClr val="13272B"/>
+                </a:solidFill>
+                <a:latin typeface="Calibri" pitchFamily="34" charset="0"/>
+                <a:ea typeface="Calibri" pitchFamily="34" charset="-122"/>
+                <a:cs typeface="Calibri" pitchFamily="34" charset="-120"/>
+              </a:rPr>
+              <a:t>Four forecasting tables are always empty</a:t>
+            </a:r>
+            <a:endParaRPr lang="en-US" sz="1500" dirty="0"/>
+          </a:p>
+        </p:txBody>
+      </p:sp>
+      <p:sp>
+        <p:nvSpPr>
+          <p:cNvPr id="6" name="Text 4"/>
+          <p:cNvSpPr/>
+          <p:nvPr/>
+        </p:nvSpPr>
+        <p:spPr>
+          <a:xfrm>
+            <a:off x="5779008" y="1828800"/>
+            <a:ext cx="457200" cy="914400"/>
+          </a:xfrm>
+          <a:prstGeom prst="rect">
+            <a:avLst/>
+          </a:prstGeom>
+          <a:noFill/>
+          <a:ln/>
+        </p:spPr>
+        <p:txBody>
+          <a:bodyPr wrap="square" lIns="0" tIns="0" rIns="0" bIns="0" rtlCol="0" anchor="ctr"/>
+          <a:lstStyle/>
+          <a:p>
+            <a:pPr algn="ctr" indent="0" marL="0">
+              <a:buNone/>
+            </a:pPr>
+            <a:r>
+              <a:rPr lang="en-US" sz="2000" b="1" dirty="0">
+                <a:solidFill>
+                  <a:srgbClr val="00A896"/>
+                </a:solidFill>
+                <a:latin typeface="Calibri" pitchFamily="34" charset="0"/>
+                <a:ea typeface="Calibri" pitchFamily="34" charset="-122"/>
+                <a:cs typeface="Calibri" pitchFamily="34" charset="-120"/>
+              </a:rPr>
+              <a:t>→</a:t>
+            </a:r>
+            <a:endParaRPr lang="en-US" sz="2000" dirty="0"/>
+          </a:p>
+        </p:txBody>
+      </p:sp>
+      <p:sp>
+        <p:nvSpPr>
+          <p:cNvPr id="7" name="Shape 5"/>
+          <p:cNvSpPr/>
+          <p:nvPr/>
+        </p:nvSpPr>
+        <p:spPr>
+          <a:xfrm>
+            <a:off x="6309360" y="1828800"/>
+            <a:ext cx="5212080" cy="914400"/>
+          </a:xfrm>
+          <a:prstGeom prst="roundRect">
+            <a:avLst>
+              <a:gd name="adj" fmla="val 8000"/>
+            </a:avLst>
+          </a:prstGeom>
+          <a:solidFill>
+            <a:srgbClr val="EAF6F5"/>
+          </a:solidFill>
+          <a:ln w="12700">
+            <a:solidFill>
+              <a:srgbClr val="DCE6E7"/>
+            </a:solidFill>
+            <a:prstDash val="solid"/>
+          </a:ln>
+        </p:spPr>
+      </p:sp>
+      <p:sp>
+        <p:nvSpPr>
+          <p:cNvPr id="8" name="Text 6"/>
+          <p:cNvSpPr/>
+          <p:nvPr/>
+        </p:nvSpPr>
+        <p:spPr>
+          <a:xfrm>
+            <a:off x="6583680" y="1828800"/>
+            <a:ext cx="4663440" cy="914400"/>
+          </a:xfrm>
+          <a:prstGeom prst="rect">
+            <a:avLst/>
+          </a:prstGeom>
+          <a:noFill/>
+          <a:ln/>
+        </p:spPr>
+        <p:txBody>
+          <a:bodyPr wrap="square" lIns="0" tIns="0" rIns="0" bIns="0" rtlCol="0" anchor="ctr"/>
+          <a:lstStyle/>
+          <a:p>
+            <a:pPr indent="0" marL="0">
+              <a:buNone/>
+            </a:pPr>
+            <a:r>
+              <a:rPr lang="en-US" sz="1500" dirty="0">
+                <a:solidFill>
+                  <a:srgbClr val="028090"/>
+                </a:solidFill>
+                <a:latin typeface="Calibri" pitchFamily="34" charset="0"/>
+                <a:ea typeface="Calibri" pitchFamily="34" charset="-122"/>
+                <a:cs typeface="Calibri" pitchFamily="34" charset="-120"/>
+              </a:rPr>
+              <a:t>computed on request, never stored</a:t>
+            </a:r>
+            <a:endParaRPr lang="en-US" sz="1500" dirty="0"/>
+          </a:p>
+        </p:txBody>
+      </p:sp>
+      <p:sp>
+        <p:nvSpPr>
+          <p:cNvPr id="9" name="Shape 7"/>
+          <p:cNvSpPr/>
+          <p:nvPr/>
+        </p:nvSpPr>
+        <p:spPr>
+          <a:xfrm>
+            <a:off x="640080" y="2944368"/>
+            <a:ext cx="5029200" cy="914400"/>
+          </a:xfrm>
+          <a:prstGeom prst="roundRect">
+            <a:avLst>
+              <a:gd name="adj" fmla="val 8000"/>
+            </a:avLst>
+          </a:prstGeom>
+          <a:solidFill>
+            <a:srgbClr val="F4F8F8"/>
+          </a:solidFill>
+          <a:ln w="12700">
+            <a:solidFill>
+              <a:srgbClr val="DCE6E7"/>
+            </a:solidFill>
+            <a:prstDash val="solid"/>
+          </a:ln>
+        </p:spPr>
+      </p:sp>
+      <p:sp>
+        <p:nvSpPr>
+          <p:cNvPr id="10" name="Text 8"/>
+          <p:cNvSpPr/>
+          <p:nvPr/>
+        </p:nvSpPr>
+        <p:spPr>
+          <a:xfrm>
+            <a:off x="914400" y="2944368"/>
+            <a:ext cx="4480560" cy="914400"/>
+          </a:xfrm>
+          <a:prstGeom prst="rect">
+            <a:avLst/>
+          </a:prstGeom>
+          <a:noFill/>
+          <a:ln/>
+        </p:spPr>
+        <p:txBody>
+          <a:bodyPr wrap="square" lIns="0" tIns="0" rIns="0" bIns="0" rtlCol="0" anchor="ctr"/>
+          <a:lstStyle/>
+          <a:p>
+            <a:pPr indent="0" marL="0">
+              <a:buNone/>
+            </a:pPr>
+            <a:r>
+              <a:rPr lang="en-US" sz="1500" b="1" dirty="0">
+                <a:solidFill>
+                  <a:srgbClr val="13272B"/>
+                </a:solidFill>
+                <a:latin typeface="Calibri" pitchFamily="34" charset="0"/>
+                <a:ea typeface="Calibri" pitchFamily="34" charset="-122"/>
+                <a:cs typeface="Calibri" pitchFamily="34" charset="-120"/>
+              </a:rPr>
+              <a:t>A query against them is valid SQL</a:t>
+            </a:r>
+            <a:endParaRPr lang="en-US" sz="1500" dirty="0"/>
+          </a:p>
+        </p:txBody>
+      </p:sp>
+      <p:sp>
+        <p:nvSpPr>
+          <p:cNvPr id="11" name="Text 9"/>
+          <p:cNvSpPr/>
+          <p:nvPr/>
+        </p:nvSpPr>
+        <p:spPr>
+          <a:xfrm>
+            <a:off x="5779008" y="2944368"/>
+            <a:ext cx="457200" cy="914400"/>
+          </a:xfrm>
+          <a:prstGeom prst="rect">
+            <a:avLst/>
+          </a:prstGeom>
+          <a:noFill/>
+          <a:ln/>
+        </p:spPr>
+        <p:txBody>
+          <a:bodyPr wrap="square" lIns="0" tIns="0" rIns="0" bIns="0" rtlCol="0" anchor="ctr"/>
+          <a:lstStyle/>
+          <a:p>
+            <a:pPr algn="ctr" indent="0" marL="0">
+              <a:buNone/>
+            </a:pPr>
+            <a:r>
+              <a:rPr lang="en-US" sz="2000" b="1" dirty="0">
+                <a:solidFill>
+                  <a:srgbClr val="00A896"/>
+                </a:solidFill>
+                <a:latin typeface="Calibri" pitchFamily="34" charset="0"/>
+                <a:ea typeface="Calibri" pitchFamily="34" charset="-122"/>
+                <a:cs typeface="Calibri" pitchFamily="34" charset="-120"/>
+              </a:rPr>
+              <a:t>→</a:t>
+            </a:r>
+            <a:endParaRPr lang="en-US" sz="2000" dirty="0"/>
+          </a:p>
+        </p:txBody>
+      </p:sp>
+      <p:sp>
+        <p:nvSpPr>
+          <p:cNvPr id="12" name="Shape 10"/>
+          <p:cNvSpPr/>
+          <p:nvPr/>
+        </p:nvSpPr>
+        <p:spPr>
+          <a:xfrm>
+            <a:off x="6309360" y="2944368"/>
+            <a:ext cx="5212080" cy="914400"/>
+          </a:xfrm>
+          <a:prstGeom prst="roundRect">
+            <a:avLst>
+              <a:gd name="adj" fmla="val 8000"/>
+            </a:avLst>
+          </a:prstGeom>
+          <a:solidFill>
+            <a:srgbClr val="EAF6F5"/>
+          </a:solidFill>
+          <a:ln w="12700">
+            <a:solidFill>
+              <a:srgbClr val="DCE6E7"/>
+            </a:solidFill>
+            <a:prstDash val="solid"/>
+          </a:ln>
+        </p:spPr>
+      </p:sp>
+      <p:sp>
+        <p:nvSpPr>
+          <p:cNvPr id="13" name="Text 11"/>
+          <p:cNvSpPr/>
+          <p:nvPr/>
+        </p:nvSpPr>
+        <p:spPr>
+          <a:xfrm>
+            <a:off x="6583680" y="2944368"/>
+            <a:ext cx="4663440" cy="914400"/>
+          </a:xfrm>
+          <a:prstGeom prst="rect">
+            <a:avLst/>
+          </a:prstGeom>
+          <a:noFill/>
+          <a:ln/>
+        </p:spPr>
+        <p:txBody>
+          <a:bodyPr wrap="square" lIns="0" tIns="0" rIns="0" bIns="0" rtlCol="0" anchor="ctr"/>
+          <a:lstStyle/>
+          <a:p>
+            <a:pPr indent="0" marL="0">
+              <a:buNone/>
+            </a:pPr>
+            <a:r>
+              <a:rPr lang="en-US" sz="1500" dirty="0">
+                <a:solidFill>
+                  <a:srgbClr val="028090"/>
+                </a:solidFill>
+                <a:latin typeface="Calibri" pitchFamily="34" charset="0"/>
+                <a:ea typeface="Calibri" pitchFamily="34" charset="-122"/>
+                <a:cs typeface="Calibri" pitchFamily="34" charset="-120"/>
+              </a:rPr>
+              <a:t>and it returns zero rows, with no error</a:t>
+            </a:r>
+            <a:endParaRPr lang="en-US" sz="1500" dirty="0"/>
+          </a:p>
+        </p:txBody>
+      </p:sp>
+      <p:sp>
+        <p:nvSpPr>
+          <p:cNvPr id="14" name="Shape 12"/>
+          <p:cNvSpPr/>
+          <p:nvPr/>
+        </p:nvSpPr>
+        <p:spPr>
+          <a:xfrm>
+            <a:off x="640080" y="4059936"/>
+            <a:ext cx="5029200" cy="914400"/>
+          </a:xfrm>
+          <a:prstGeom prst="roundRect">
+            <a:avLst>
+              <a:gd name="adj" fmla="val 8000"/>
+            </a:avLst>
+          </a:prstGeom>
+          <a:solidFill>
+            <a:srgbClr val="F4F8F8"/>
+          </a:solidFill>
+          <a:ln w="12700">
+            <a:solidFill>
+              <a:srgbClr val="DCE6E7"/>
+            </a:solidFill>
+            <a:prstDash val="solid"/>
+          </a:ln>
+        </p:spPr>
+      </p:sp>
+      <p:sp>
+        <p:nvSpPr>
+          <p:cNvPr id="15" name="Text 13"/>
+          <p:cNvSpPr/>
+          <p:nvPr/>
+        </p:nvSpPr>
+        <p:spPr>
+          <a:xfrm>
+            <a:off x="914400" y="4059936"/>
+            <a:ext cx="4480560" cy="914400"/>
+          </a:xfrm>
+          <a:prstGeom prst="rect">
+            <a:avLst/>
+          </a:prstGeom>
+          <a:noFill/>
+          <a:ln/>
+        </p:spPr>
+        <p:txBody>
+          <a:bodyPr wrap="square" lIns="0" tIns="0" rIns="0" bIns="0" rtlCol="0" anchor="ctr"/>
+          <a:lstStyle/>
+          <a:p>
+            <a:pPr indent="0" marL="0">
+              <a:buNone/>
+            </a:pPr>
+            <a:r>
+              <a:rPr lang="en-US" sz="1500" b="1" dirty="0">
+                <a:solidFill>
+                  <a:srgbClr val="13272B"/>
+                </a:solidFill>
+                <a:latin typeface="Calibri" pitchFamily="34" charset="0"/>
+                <a:ea typeface="Calibri" pitchFamily="34" charset="-122"/>
+                <a:cs typeface="Calibri" pitchFamily="34" charset="-120"/>
+              </a:rPr>
+              <a:t>“No rows” looks like an answer</a:t>
+            </a:r>
+            <a:endParaRPr lang="en-US" sz="1500" dirty="0"/>
+          </a:p>
+        </p:txBody>
+      </p:sp>
+      <p:sp>
+        <p:nvSpPr>
+          <p:cNvPr id="16" name="Text 14"/>
+          <p:cNvSpPr/>
+          <p:nvPr/>
+        </p:nvSpPr>
+        <p:spPr>
+          <a:xfrm>
+            <a:off x="5779008" y="4059936"/>
+            <a:ext cx="457200" cy="914400"/>
+          </a:xfrm>
+          <a:prstGeom prst="rect">
+            <a:avLst/>
+          </a:prstGeom>
+          <a:noFill/>
+          <a:ln/>
+        </p:spPr>
+        <p:txBody>
+          <a:bodyPr wrap="square" lIns="0" tIns="0" rIns="0" bIns="0" rtlCol="0" anchor="ctr"/>
+          <a:lstStyle/>
+          <a:p>
+            <a:pPr algn="ctr" indent="0" marL="0">
+              <a:buNone/>
+            </a:pPr>
+            <a:r>
+              <a:rPr lang="en-US" sz="2000" b="1" dirty="0">
+                <a:solidFill>
+                  <a:srgbClr val="00A896"/>
+                </a:solidFill>
+                <a:latin typeface="Calibri" pitchFamily="34" charset="0"/>
+                <a:ea typeface="Calibri" pitchFamily="34" charset="-122"/>
+                <a:cs typeface="Calibri" pitchFamily="34" charset="-120"/>
+              </a:rPr>
+              <a:t>→</a:t>
+            </a:r>
+            <a:endParaRPr lang="en-US" sz="2000" dirty="0"/>
+          </a:p>
+        </p:txBody>
+      </p:sp>
+      <p:sp>
+        <p:nvSpPr>
+          <p:cNvPr id="17" name="Shape 15"/>
+          <p:cNvSpPr/>
+          <p:nvPr/>
+        </p:nvSpPr>
+        <p:spPr>
+          <a:xfrm>
+            <a:off x="6309360" y="4059936"/>
+            <a:ext cx="5212080" cy="914400"/>
+          </a:xfrm>
+          <a:prstGeom prst="roundRect">
+            <a:avLst>
+              <a:gd name="adj" fmla="val 8000"/>
+            </a:avLst>
+          </a:prstGeom>
+          <a:solidFill>
+            <a:srgbClr val="EAF6F5"/>
+          </a:solidFill>
+          <a:ln w="12700">
+            <a:solidFill>
+              <a:srgbClr val="DCE6E7"/>
+            </a:solidFill>
+            <a:prstDash val="solid"/>
+          </a:ln>
+        </p:spPr>
+      </p:sp>
+      <p:sp>
+        <p:nvSpPr>
+          <p:cNvPr id="18" name="Text 16"/>
+          <p:cNvSpPr/>
+          <p:nvPr/>
+        </p:nvSpPr>
+        <p:spPr>
+          <a:xfrm>
+            <a:off x="6583680" y="4059936"/>
+            <a:ext cx="4663440" cy="914400"/>
+          </a:xfrm>
+          <a:prstGeom prst="rect">
+            <a:avLst/>
+          </a:prstGeom>
+          <a:noFill/>
+          <a:ln/>
+        </p:spPr>
+        <p:txBody>
+          <a:bodyPr wrap="square" lIns="0" tIns="0" rIns="0" bIns="0" rtlCol="0" anchor="ctr"/>
+          <a:lstStyle/>
+          <a:p>
+            <a:pPr indent="0" marL="0">
+              <a:buNone/>
+            </a:pPr>
+            <a:r>
+              <a:rPr lang="en-US" sz="1500" dirty="0">
+                <a:solidFill>
+                  <a:srgbClr val="028090"/>
+                </a:solidFill>
+                <a:latin typeface="Calibri" pitchFamily="34" charset="0"/>
+                <a:ea typeface="Calibri" pitchFamily="34" charset="-122"/>
+                <a:cs typeface="Calibri" pitchFamily="34" charset="-120"/>
+              </a:rPr>
+              <a:t>“there is nothing to reorder”</a:t>
+            </a:r>
+            <a:endParaRPr lang="en-US" sz="1500" dirty="0"/>
+          </a:p>
+        </p:txBody>
+      </p:sp>
+      <p:sp>
+        <p:nvSpPr>
+          <p:cNvPr id="19" name="Text 17"/>
+          <p:cNvSpPr/>
+          <p:nvPr/>
+        </p:nvSpPr>
+        <p:spPr>
+          <a:xfrm>
+            <a:off x="640080" y="5440680"/>
+            <a:ext cx="10881360" cy="365760"/>
+          </a:xfrm>
+          <a:prstGeom prst="rect">
+            <a:avLst/>
+          </a:prstGeom>
+          <a:noFill/>
+          <a:ln/>
+        </p:spPr>
+        <p:txBody>
+          <a:bodyPr wrap="square" lIns="0" tIns="0" rIns="0" bIns="0" rtlCol="0" anchor="ctr"/>
+          <a:lstStyle/>
+          <a:p>
+            <a:pPr indent="0" marL="0">
+              <a:buNone/>
+            </a:pPr>
+            <a:r>
+              <a:rPr lang="en-US" sz="1300" i="1" dirty="0">
+                <a:solidFill>
+                  <a:srgbClr val="5C7378"/>
+                </a:solidFill>
+                <a:latin typeface="Calibri" pitchFamily="34" charset="0"/>
+                <a:ea typeface="Calibri" pitchFamily="34" charset="-122"/>
+                <a:cs typeface="Calibri" pitchFamily="34" charset="-120"/>
+              </a:rPr>
+              <a:t>So Ask declines in a sentence — a reason, not an empty table. Refusing to guess is the system working, not failing.</a:t>
+            </a:r>
+            <a:endParaRPr lang="en-US" sz="1300" dirty="0"/>
+          </a:p>
+        </p:txBody>
+      </p:sp>
+    </p:spTree>
+  </p:cSld>
+  <p:clrMapOvr>
+    <a:masterClrMapping/>
+  </p:clrMapOvr>
+</p:sld>
+</file>
+
+<file path=ppt/slides/slide15.xml><?xml version="1.0" encoding="utf-8"?>
+<p:sld xmlns:a="http://schemas.openxmlformats.org/drawingml/2006/main" xmlns:r="http://schemas.openxmlformats.org/officeDocument/2006/relationships" xmlns:p="http://schemas.openxmlformats.org/presentationml/2006/main">
   <p:cSld name="Slide 12">
     <p:bg>
       <p:bgPr>
@@ -4166,7 +6582,7 @@
                 <a:ea typeface="Calibri" pitchFamily="34" charset="-122"/>
                 <a:cs typeface="Calibri" pitchFamily="34" charset="-120"/>
               </a:rPr>
-              <a:t>One capability is generative. Four are statistics. We label them that way in the product.</a:t>
+              <a:t>Two capabilities are generative. Four are statistics. We label them that way in the product.</a:t>
             </a:r>
             <a:endParaRPr lang="en-US" sz="1500" dirty="0"/>
           </a:p>
@@ -4180,8 +6596,8 @@
         </p:nvSpPr>
         <p:spPr>
           <a:xfrm>
-            <a:off x="640080" y="2194560"/>
-            <a:ext cx="10881360" cy="658368"/>
+            <a:off x="640080" y="2084831"/>
+            <a:ext cx="10881360" cy="603504"/>
           </a:xfrm>
           <a:prstGeom prst="roundRect">
             <a:avLst>
@@ -4207,7 +6623,7 @@
         </p:nvSpPr>
         <p:spPr>
           <a:xfrm>
-            <a:off x="896112" y="2313432"/>
+            <a:off x="896112" y="2176272"/>
             <a:ext cx="420624" cy="420624"/>
           </a:xfrm>
           <a:prstGeom prst="ellipse">
@@ -4227,7 +6643,7 @@
         </p:nvSpPr>
         <p:spPr>
           <a:xfrm>
-            <a:off x="896112" y="2313432"/>
+            <a:off x="896112" y="2176272"/>
             <a:ext cx="420624" cy="420624"/>
           </a:xfrm>
           <a:prstGeom prst="rect">
@@ -4266,8 +6682,8 @@
         </p:nvSpPr>
         <p:spPr>
           <a:xfrm>
-            <a:off x="1508760" y="2194560"/>
-            <a:ext cx="3840480" cy="658368"/>
+            <a:off x="1508760" y="2084831"/>
+            <a:ext cx="3840480" cy="603504"/>
           </a:xfrm>
           <a:prstGeom prst="rect">
             <a:avLst/>
@@ -4305,8 +6721,8 @@
         </p:nvSpPr>
         <p:spPr>
           <a:xfrm>
-            <a:off x="5486400" y="2194560"/>
-            <a:ext cx="5852160" cy="658368"/>
+            <a:off x="5486400" y="2084831"/>
+            <a:ext cx="5852160" cy="603504"/>
           </a:xfrm>
           <a:prstGeom prst="rect">
             <a:avLst/>
@@ -4344,8 +6760,8 @@
         </p:nvSpPr>
         <p:spPr>
           <a:xfrm>
-            <a:off x="640080" y="2971800"/>
-            <a:ext cx="10881360" cy="658368"/>
+            <a:off x="640080" y="3474720"/>
+            <a:ext cx="10881360" cy="603504"/>
           </a:xfrm>
           <a:prstGeom prst="roundRect">
             <a:avLst>
@@ -4371,7 +6787,7 @@
         </p:nvSpPr>
         <p:spPr>
           <a:xfrm>
-            <a:off x="896112" y="3090672"/>
+            <a:off x="896112" y="3566160"/>
             <a:ext cx="420624" cy="420624"/>
           </a:xfrm>
           <a:prstGeom prst="ellipse">
@@ -4391,7 +6807,7 @@
         </p:nvSpPr>
         <p:spPr>
           <a:xfrm>
-            <a:off x="896112" y="3090672"/>
+            <a:off x="896112" y="3566160"/>
             <a:ext cx="420624" cy="420624"/>
           </a:xfrm>
           <a:prstGeom prst="rect">
@@ -4430,8 +6846,8 @@
         </p:nvSpPr>
         <p:spPr>
           <a:xfrm>
-            <a:off x="1508760" y="2971800"/>
-            <a:ext cx="3840480" cy="658368"/>
+            <a:off x="1508760" y="3474720"/>
+            <a:ext cx="3840480" cy="603504"/>
           </a:xfrm>
           <a:prstGeom prst="rect">
             <a:avLst/>
@@ -4469,8 +6885,8 @@
         </p:nvSpPr>
         <p:spPr>
           <a:xfrm>
-            <a:off x="5486400" y="2971800"/>
-            <a:ext cx="5852160" cy="658368"/>
+            <a:off x="5486400" y="3474720"/>
+            <a:ext cx="5852160" cy="603504"/>
           </a:xfrm>
           <a:prstGeom prst="rect">
             <a:avLst/>
@@ -4508,8 +6924,8 @@
         </p:nvSpPr>
         <p:spPr>
           <a:xfrm>
-            <a:off x="640080" y="3749040"/>
-            <a:ext cx="10881360" cy="658368"/>
+            <a:off x="640080" y="4169664"/>
+            <a:ext cx="10881360" cy="603504"/>
           </a:xfrm>
           <a:prstGeom prst="roundRect">
             <a:avLst>
@@ -4535,7 +6951,7 @@
         </p:nvSpPr>
         <p:spPr>
           <a:xfrm>
-            <a:off x="896112" y="3867912"/>
+            <a:off x="896112" y="4261104"/>
             <a:ext cx="420624" cy="420624"/>
           </a:xfrm>
           <a:prstGeom prst="ellipse">
@@ -4555,7 +6971,7 @@
         </p:nvSpPr>
         <p:spPr>
           <a:xfrm>
-            <a:off x="896112" y="3867912"/>
+            <a:off x="896112" y="4261104"/>
             <a:ext cx="420624" cy="420624"/>
           </a:xfrm>
           <a:prstGeom prst="rect">
@@ -4594,8 +7010,8 @@
         </p:nvSpPr>
         <p:spPr>
           <a:xfrm>
-            <a:off x="1508760" y="3749040"/>
-            <a:ext cx="3840480" cy="658368"/>
+            <a:off x="1508760" y="4169664"/>
+            <a:ext cx="3840480" cy="603504"/>
           </a:xfrm>
           <a:prstGeom prst="rect">
             <a:avLst/>
@@ -4633,8 +7049,8 @@
         </p:nvSpPr>
         <p:spPr>
           <a:xfrm>
-            <a:off x="5486400" y="3749040"/>
-            <a:ext cx="5852160" cy="658368"/>
+            <a:off x="5486400" y="4169664"/>
+            <a:ext cx="5852160" cy="603504"/>
           </a:xfrm>
           <a:prstGeom prst="rect">
             <a:avLst/>
@@ -4672,8 +7088,8 @@
         </p:nvSpPr>
         <p:spPr>
           <a:xfrm>
-            <a:off x="640080" y="4526280"/>
-            <a:ext cx="10881360" cy="658368"/>
+            <a:off x="640080" y="4864608"/>
+            <a:ext cx="10881360" cy="603504"/>
           </a:xfrm>
           <a:prstGeom prst="roundRect">
             <a:avLst>
@@ -4699,7 +7115,7 @@
         </p:nvSpPr>
         <p:spPr>
           <a:xfrm>
-            <a:off x="896112" y="4645152"/>
+            <a:off x="896112" y="4956048"/>
             <a:ext cx="420624" cy="420624"/>
           </a:xfrm>
           <a:prstGeom prst="ellipse">
@@ -4719,7 +7135,7 @@
         </p:nvSpPr>
         <p:spPr>
           <a:xfrm>
-            <a:off x="896112" y="4645152"/>
+            <a:off x="896112" y="4956048"/>
             <a:ext cx="420624" cy="420624"/>
           </a:xfrm>
           <a:prstGeom prst="rect">
@@ -4758,8 +7174,8 @@
         </p:nvSpPr>
         <p:spPr>
           <a:xfrm>
-            <a:off x="1508760" y="4526280"/>
-            <a:ext cx="3840480" cy="658368"/>
+            <a:off x="1508760" y="4864608"/>
+            <a:ext cx="3840480" cy="603504"/>
           </a:xfrm>
           <a:prstGeom prst="rect">
             <a:avLst/>
@@ -4797,8 +7213,8 @@
         </p:nvSpPr>
         <p:spPr>
           <a:xfrm>
-            <a:off x="5486400" y="4526280"/>
-            <a:ext cx="5852160" cy="658368"/>
+            <a:off x="5486400" y="4864608"/>
+            <a:ext cx="5852160" cy="603504"/>
           </a:xfrm>
           <a:prstGeom prst="rect">
             <a:avLst/>
@@ -4836,8 +7252,8 @@
         </p:nvSpPr>
         <p:spPr>
           <a:xfrm>
-            <a:off x="640080" y="5303520"/>
-            <a:ext cx="10881360" cy="658368"/>
+            <a:off x="640080" y="5559552"/>
+            <a:ext cx="10881360" cy="603504"/>
           </a:xfrm>
           <a:prstGeom prst="roundRect">
             <a:avLst>
@@ -4863,7 +7279,7 @@
         </p:nvSpPr>
         <p:spPr>
           <a:xfrm>
-            <a:off x="896112" y="5422392"/>
+            <a:off x="896112" y="5650992"/>
             <a:ext cx="420624" cy="420624"/>
           </a:xfrm>
           <a:prstGeom prst="ellipse">
@@ -4883,7 +7299,7 @@
         </p:nvSpPr>
         <p:spPr>
           <a:xfrm>
-            <a:off x="896112" y="5422392"/>
+            <a:off x="896112" y="5650992"/>
             <a:ext cx="420624" cy="420624"/>
           </a:xfrm>
           <a:prstGeom prst="rect">
@@ -4922,8 +7338,8 @@
         </p:nvSpPr>
         <p:spPr>
           <a:xfrm>
-            <a:off x="1508760" y="5303520"/>
-            <a:ext cx="3840480" cy="658368"/>
+            <a:off x="1508760" y="5559552"/>
+            <a:ext cx="3840480" cy="603504"/>
           </a:xfrm>
           <a:prstGeom prst="rect">
             <a:avLst/>
@@ -4961,8 +7377,8 @@
         </p:nvSpPr>
         <p:spPr>
           <a:xfrm>
-            <a:off x="5486400" y="5303520"/>
-            <a:ext cx="5852160" cy="658368"/>
+            <a:off x="5486400" y="5559552"/>
+            <a:ext cx="5852160" cy="603504"/>
           </a:xfrm>
           <a:prstGeom prst="rect">
             <a:avLst/>
@@ -4987,6 +7403,170 @@
                 <a:cs typeface="Calibri" pitchFamily="34" charset="-120"/>
               </a:rPr>
               <a:t>Measured percentiles</a:t>
+            </a:r>
+            <a:endParaRPr lang="en-US" sz="1400" dirty="0"/>
+          </a:p>
+        </p:txBody>
+      </p:sp>
+      <p:sp>
+        <p:nvSpPr>
+          <p:cNvPr id="30" name="Shape 3 ask"/>
+          <p:cNvSpPr/>
+          <p:nvPr/>
+        </p:nvSpPr>
+        <p:spPr>
+          <a:xfrm>
+            <a:off x="640080" y="2779776"/>
+            <a:ext cx="10881360" cy="603504"/>
+          </a:xfrm>
+          <a:prstGeom prst="roundRect">
+            <a:avLst>
+              <a:gd name="adj" fmla="val 11111"/>
+            </a:avLst>
+          </a:prstGeom>
+          <a:solidFill>
+            <a:srgbClr val="EAF6F5"/>
+          </a:solidFill>
+          <a:ln w="12700">
+            <a:solidFill>
+              <a:srgbClr val="DCE6E7"/>
+            </a:solidFill>
+            <a:prstDash val="solid"/>
+          </a:ln>
+        </p:spPr>
+      </p:sp>
+      <p:sp>
+        <p:nvSpPr>
+          <p:cNvPr id="31" name="Shape 4 ask"/>
+          <p:cNvSpPr/>
+          <p:nvPr/>
+        </p:nvSpPr>
+        <p:spPr>
+          <a:xfrm>
+            <a:off x="896112" y="2871216"/>
+            <a:ext cx="420624" cy="420624"/>
+          </a:xfrm>
+          <a:prstGeom prst="ellipse">
+            <a:avLst/>
+          </a:prstGeom>
+          <a:solidFill>
+            <a:srgbClr val="028090"/>
+          </a:solidFill>
+          <a:ln/>
+        </p:spPr>
+      </p:sp>
+      <p:sp>
+        <p:nvSpPr>
+          <p:cNvPr id="32" name="Text 5 ask"/>
+          <p:cNvSpPr/>
+          <p:nvPr/>
+        </p:nvSpPr>
+        <p:spPr>
+          <a:xfrm>
+            <a:off x="896112" y="2871216"/>
+            <a:ext cx="420624" cy="420624"/>
+          </a:xfrm>
+          <a:prstGeom prst="rect">
+            <a:avLst/>
+          </a:prstGeom>
+          <a:noFill/>
+          <a:ln/>
+        </p:spPr>
+        <p:txBody>
+          <a:bodyPr wrap="square" lIns="0" tIns="0" rIns="0" bIns="0" rtlCol="0" anchor="ctr"/>
+          <a:lstStyle/>
+          <a:p>
+            <a:pPr algn="ctr" indent="0" marL="0">
+              <a:buNone/>
+            </a:pPr>
+            <a:r>
+              <a:rPr lang="en-US" sz="1400" b="1" dirty="0">
+                <a:solidFill>
+                  <a:srgbClr val="FFFFFF"/>
+                </a:solidFill>
+                <a:latin typeface="Calibri" pitchFamily="34" charset="0"/>
+                <a:ea typeface="Calibri" pitchFamily="34" charset="-122"/>
+                <a:cs typeface="Calibri" pitchFamily="34" charset="-120"/>
+              </a:rPr>
+              <a:t>AI</a:t>
+            </a:r>
+            <a:endParaRPr lang="en-US" sz="1400" dirty="0"/>
+          </a:p>
+        </p:txBody>
+      </p:sp>
+      <p:sp>
+        <p:nvSpPr>
+          <p:cNvPr id="33" name="Text 6 ask"/>
+          <p:cNvSpPr/>
+          <p:nvPr/>
+        </p:nvSpPr>
+        <p:spPr>
+          <a:xfrm>
+            <a:off x="1508760" y="2779776"/>
+            <a:ext cx="3840480" cy="603504"/>
+          </a:xfrm>
+          <a:prstGeom prst="rect">
+            <a:avLst/>
+          </a:prstGeom>
+          <a:noFill/>
+          <a:ln/>
+        </p:spPr>
+        <p:txBody>
+          <a:bodyPr wrap="square" lIns="0" tIns="0" rIns="0" bIns="0" rtlCol="0" anchor="ctr"/>
+          <a:lstStyle/>
+          <a:p>
+            <a:pPr indent="0" marL="0">
+              <a:buNone/>
+            </a:pPr>
+            <a:r>
+              <a:rPr lang="en-US" sz="1550" b="1" dirty="0">
+                <a:solidFill>
+                  <a:srgbClr val="028090"/>
+                </a:solidFill>
+                <a:latin typeface="Calibri" pitchFamily="34" charset="0"/>
+                <a:ea typeface="Calibri" pitchFamily="34" charset="-122"/>
+                <a:cs typeface="Calibri" pitchFamily="34" charset="-120"/>
+              </a:rPr>
+              <a:t>Ask a question</a:t>
+            </a:r>
+            <a:endParaRPr lang="en-US" sz="1550" dirty="0"/>
+          </a:p>
+        </p:txBody>
+      </p:sp>
+      <p:sp>
+        <p:nvSpPr>
+          <p:cNvPr id="34" name="Text 7 ask"/>
+          <p:cNvSpPr/>
+          <p:nvPr/>
+        </p:nvSpPr>
+        <p:spPr>
+          <a:xfrm>
+            <a:off x="5486400" y="2779776"/>
+            <a:ext cx="5852160" cy="603504"/>
+          </a:xfrm>
+          <a:prstGeom prst="rect">
+            <a:avLst/>
+          </a:prstGeom>
+          <a:noFill/>
+          <a:ln/>
+        </p:spPr>
+        <p:txBody>
+          <a:bodyPr wrap="square" lIns="0" tIns="0" rIns="0" bIns="0" rtlCol="0" anchor="ctr"/>
+          <a:lstStyle/>
+          <a:p>
+            <a:pPr indent="0" marL="0">
+              <a:buNone/>
+            </a:pPr>
+            <a:r>
+              <a:rPr lang="en-US" sz="1400" dirty="0">
+                <a:solidFill>
+                  <a:srgbClr val="028090"/>
+                </a:solidFill>
+                <a:latin typeface="Calibri" pitchFamily="34" charset="0"/>
+                <a:ea typeface="Calibri" pitchFamily="34" charset="-122"/>
+                <a:cs typeface="Calibri" pitchFamily="34" charset="-120"/>
+              </a:rPr>
+              <a:t>Gemini — one SELECT, checked before it runs</a:t>
             </a:r>
             <a:endParaRPr lang="en-US" sz="1400" dirty="0"/>
           </a:p>
@@ -5000,7 +7580,7 @@
 </p:sld>
 </file>
 
-<file path=ppt/slides/slide13.xml><?xml version="1.0" encoding="utf-8"?>
+<file path=ppt/slides/slide16.xml><?xml version="1.0" encoding="utf-8"?>
 <p:sld xmlns:a="http://schemas.openxmlformats.org/drawingml/2006/main" xmlns:r="http://schemas.openxmlformats.org/officeDocument/2006/relationships" xmlns:p="http://schemas.openxmlformats.org/presentationml/2006/main">
   <p:cSld name="Slide 13">
     <p:bg>
@@ -5201,7 +7781,7 @@
                 <a:ea typeface="Calibri" pitchFamily="34" charset="-122"/>
                 <a:cs typeface="Calibri" pitchFamily="34" charset="-120"/>
               </a:rPr>
-              <a:t>forecasting · exceptions · lead times · replenishment · invoice intake</a:t>
+              <a:t>forecasting · exceptions · lead times · replenishment · invoice intake · ask</a:t>
             </a:r>
             <a:endParaRPr lang="en-US" sz="1300" dirty="0"/>
           </a:p>
@@ -5464,7 +8044,7 @@
 </p:sld>
 </file>
 
-<file path=ppt/slides/slide14.xml><?xml version="1.0" encoding="utf-8"?>
+<file path=ppt/slides/slide17.xml><?xml version="1.0" encoding="utf-8"?>
 <p:sld xmlns:a="http://schemas.openxmlformats.org/drawingml/2006/main" xmlns:r="http://schemas.openxmlformats.org/officeDocument/2006/relationships" xmlns:p="http://schemas.openxmlformats.org/presentationml/2006/main">
   <p:cSld name="Slide 14">
     <p:bg>
@@ -6259,7 +8839,7 @@
 </p:sld>
 </file>
 
-<file path=ppt/slides/slide15.xml><?xml version="1.0" encoding="utf-8"?>
+<file path=ppt/slides/slide18.xml><?xml version="1.0" encoding="utf-8"?>
 <p:sld xmlns:a="http://schemas.openxmlformats.org/drawingml/2006/main" xmlns:r="http://schemas.openxmlformats.org/officeDocument/2006/relationships" xmlns:p="http://schemas.openxmlformats.org/presentationml/2006/main">
   <p:cSld name="Slide 15">
     <p:bg>
@@ -6472,7 +9052,7 @@
                 <a:ea typeface="Cambria" pitchFamily="34" charset="-122"/>
                 <a:cs typeface="Cambria" pitchFamily="34" charset="-120"/>
               </a:rPr>
-              <a:t>96</a:t>
+              <a:t>97</a:t>
             </a:r>
             <a:endParaRPr lang="en-US" sz="4800" dirty="0"/>
           </a:p>
@@ -6628,7 +9208,7 @@
                 <a:ea typeface="Cambria" pitchFamily="34" charset="-122"/>
                 <a:cs typeface="Cambria" pitchFamily="34" charset="-120"/>
               </a:rPr>
-              <a:t>392</a:t>
+              <a:t>494</a:t>
             </a:r>
             <a:endParaRPr lang="en-US" sz="4800" dirty="0"/>
           </a:p>
@@ -6891,7 +9471,7 @@
 </p:sld>
 </file>
 
-<file path=ppt/slides/slide16.xml><?xml version="1.0" encoding="utf-8"?>
+<file path=ppt/slides/slide19.xml><?xml version="1.0" encoding="utf-8"?>
 <p:sld xmlns:a="http://schemas.openxmlformats.org/drawingml/2006/main" xmlns:r="http://schemas.openxmlformats.org/officeDocument/2006/relationships" xmlns:p="http://schemas.openxmlformats.org/presentationml/2006/main">
   <p:cSld name="Slide 16">
     <p:bg>
@@ -7362,1043 +9942,6 @@
               <a:t>It found four broken setup steps, which we fixed.</a:t>
             </a:r>
             <a:endParaRPr lang="en-US" sz="1250" dirty="0"/>
-          </a:p>
-        </p:txBody>
-      </p:sp>
-    </p:spTree>
-  </p:cSld>
-  <p:clrMapOvr>
-    <a:masterClrMapping/>
-  </p:clrMapOvr>
-</p:sld>
-</file>
-
-<file path=ppt/slides/slide17.xml><?xml version="1.0" encoding="utf-8"?>
-<p:sld xmlns:a="http://schemas.openxmlformats.org/drawingml/2006/main" xmlns:r="http://schemas.openxmlformats.org/officeDocument/2006/relationships" xmlns:p="http://schemas.openxmlformats.org/presentationml/2006/main">
-  <p:cSld name="Slide 17">
-    <p:bg>
-      <p:bgPr>
-        <a:solidFill>
-          <a:srgbClr val="FFFFFF"/>
-        </a:solidFill>
-      </p:bgPr>
-    </p:bg>
-    <p:spTree>
-      <p:nvGrpSpPr>
-        <p:cNvPr id="1" name=""/>
-        <p:cNvGrpSpPr/>
-        <p:nvPr/>
-      </p:nvGrpSpPr>
-      <p:grpSpPr>
-        <a:xfrm>
-          <a:off x="0" y="0"/>
-          <a:ext cx="0" cy="0"/>
-          <a:chOff x="0" y="0"/>
-          <a:chExt cx="0" cy="0"/>
-        </a:xfrm>
-      </p:grpSpPr>
-      <p:sp>
-        <p:nvSpPr>
-          <p:cNvPr id="2" name="Text 0"/>
-          <p:cNvSpPr/>
-          <p:nvPr/>
-        </p:nvSpPr>
-        <p:spPr>
-          <a:xfrm>
-            <a:off x="640080" y="384048"/>
-            <a:ext cx="7315200" cy="256032"/>
-          </a:xfrm>
-          <a:prstGeom prst="rect">
-            <a:avLst/>
-          </a:prstGeom>
-          <a:noFill/>
-          <a:ln/>
-        </p:spPr>
-        <p:txBody>
-          <a:bodyPr wrap="square" lIns="0" tIns="0" rIns="0" bIns="0" rtlCol="0" anchor="ctr"/>
-          <a:lstStyle/>
-          <a:p>
-            <a:pPr indent="0" marL="0">
-              <a:buNone/>
-            </a:pPr>
-            <a:r>
-              <a:rPr lang="en-US" sz="1200" b="1" spc="200" kern="0" dirty="0">
-                <a:solidFill>
-                  <a:srgbClr val="00A896"/>
-                </a:solidFill>
-                <a:latin typeface="Calibri" pitchFamily="34" charset="0"/>
-                <a:ea typeface="Calibri" pitchFamily="34" charset="-122"/>
-                <a:cs typeface="Calibri" pitchFamily="34" charset="-120"/>
-              </a:rPr>
-              <a:t>LIMITATIONS &amp; ROADMAP</a:t>
-            </a:r>
-            <a:endParaRPr lang="en-US" sz="1200" dirty="0"/>
-          </a:p>
-        </p:txBody>
-      </p:sp>
-      <p:sp>
-        <p:nvSpPr>
-          <p:cNvPr id="3" name="Text 1"/>
-          <p:cNvSpPr/>
-          <p:nvPr/>
-        </p:nvSpPr>
-        <p:spPr>
-          <a:xfrm>
-            <a:off x="640080" y="658368"/>
-            <a:ext cx="10881360" cy="777240"/>
-          </a:xfrm>
-          <a:prstGeom prst="rect">
-            <a:avLst/>
-          </a:prstGeom>
-          <a:noFill/>
-          <a:ln/>
-        </p:spPr>
-        <p:txBody>
-          <a:bodyPr wrap="square" lIns="0" tIns="0" rIns="0" bIns="0" rtlCol="0" anchor="ctr"/>
-          <a:lstStyle/>
-          <a:p>
-            <a:pPr indent="0" marL="0">
-              <a:buNone/>
-            </a:pPr>
-            <a:r>
-              <a:rPr lang="en-US" sz="3600" b="1" dirty="0">
-                <a:solidFill>
-                  <a:srgbClr val="13272B"/>
-                </a:solidFill>
-                <a:latin typeface="Cambria" pitchFamily="34" charset="0"/>
-                <a:ea typeface="Cambria" pitchFamily="34" charset="-122"/>
-                <a:cs typeface="Cambria" pitchFamily="34" charset="-120"/>
-              </a:rPr>
-              <a:t>What we would do next</a:t>
-            </a:r>
-            <a:endParaRPr lang="en-US" sz="3600" dirty="0"/>
-          </a:p>
-        </p:txBody>
-      </p:sp>
-      <p:sp>
-        <p:nvSpPr>
-          <p:cNvPr id="4" name="Shape 2"/>
-          <p:cNvSpPr/>
-          <p:nvPr/>
-        </p:nvSpPr>
-        <p:spPr>
-          <a:xfrm>
-            <a:off x="640080" y="1874520"/>
-            <a:ext cx="10881360" cy="960120"/>
-          </a:xfrm>
-          <a:prstGeom prst="roundRect">
-            <a:avLst>
-              <a:gd name="adj" fmla="val 7619"/>
-            </a:avLst>
-          </a:prstGeom>
-          <a:solidFill>
-            <a:srgbClr val="F4F8F8"/>
-          </a:solidFill>
-          <a:ln w="12700">
-            <a:solidFill>
-              <a:srgbClr val="DCE6E7"/>
-            </a:solidFill>
-            <a:prstDash val="solid"/>
-          </a:ln>
-        </p:spPr>
-      </p:sp>
-      <p:sp>
-        <p:nvSpPr>
-          <p:cNvPr id="5" name="Shape 3"/>
-          <p:cNvSpPr/>
-          <p:nvPr/>
-        </p:nvSpPr>
-        <p:spPr>
-          <a:xfrm>
-            <a:off x="914400" y="2130552"/>
-            <a:ext cx="438912" cy="438912"/>
-          </a:xfrm>
-          <a:prstGeom prst="ellipse">
-            <a:avLst/>
-          </a:prstGeom>
-          <a:solidFill>
-            <a:srgbClr val="C77700"/>
-          </a:solidFill>
-          <a:ln/>
-        </p:spPr>
-      </p:sp>
-      <p:sp>
-        <p:nvSpPr>
-          <p:cNvPr id="6" name="Text 4"/>
-          <p:cNvSpPr/>
-          <p:nvPr/>
-        </p:nvSpPr>
-        <p:spPr>
-          <a:xfrm>
-            <a:off x="914400" y="2130552"/>
-            <a:ext cx="438912" cy="438912"/>
-          </a:xfrm>
-          <a:prstGeom prst="rect">
-            <a:avLst/>
-          </a:prstGeom>
-          <a:noFill/>
-          <a:ln/>
-        </p:spPr>
-        <p:txBody>
-          <a:bodyPr wrap="square" lIns="0" tIns="0" rIns="0" bIns="0" rtlCol="0" anchor="ctr"/>
-          <a:lstStyle/>
-          <a:p>
-            <a:pPr algn="ctr" indent="0" marL="0">
-              <a:buNone/>
-            </a:pPr>
-            <a:r>
-              <a:rPr lang="en-US" sz="1400" b="1" dirty="0">
-                <a:solidFill>
-                  <a:srgbClr val="FFFFFF"/>
-                </a:solidFill>
-                <a:latin typeface="Calibri" pitchFamily="34" charset="0"/>
-                <a:ea typeface="Calibri" pitchFamily="34" charset="-122"/>
-                <a:cs typeface="Calibri" pitchFamily="34" charset="-120"/>
-              </a:rPr>
-              <a:t>›</a:t>
-            </a:r>
-            <a:endParaRPr lang="en-US" sz="1400" dirty="0"/>
-          </a:p>
-        </p:txBody>
-      </p:sp>
-      <p:sp>
-        <p:nvSpPr>
-          <p:cNvPr id="7" name="Text 5"/>
-          <p:cNvSpPr/>
-          <p:nvPr/>
-        </p:nvSpPr>
-        <p:spPr>
-          <a:xfrm>
-            <a:off x="1600200" y="2020824"/>
-            <a:ext cx="9784080" cy="329184"/>
-          </a:xfrm>
-          <a:prstGeom prst="rect">
-            <a:avLst/>
-          </a:prstGeom>
-          <a:noFill/>
-          <a:ln/>
-        </p:spPr>
-        <p:txBody>
-          <a:bodyPr wrap="square" lIns="0" tIns="0" rIns="0" bIns="0" rtlCol="0" anchor="ctr"/>
-          <a:lstStyle/>
-          <a:p>
-            <a:pPr indent="0" marL="0">
-              <a:buNone/>
-            </a:pPr>
-            <a:r>
-              <a:rPr lang="en-US" sz="1600" b="1" dirty="0">
-                <a:solidFill>
-                  <a:srgbClr val="13272B"/>
-                </a:solidFill>
-                <a:latin typeface="Calibri" pitchFamily="34" charset="0"/>
-                <a:ea typeface="Calibri" pitchFamily="34" charset="-122"/>
-                <a:cs typeface="Calibri" pitchFamily="34" charset="-120"/>
-              </a:rPr>
-              <a:t>Fix an intermittent race in the e2e suite</a:t>
-            </a:r>
-            <a:endParaRPr lang="en-US" sz="1600" dirty="0"/>
-          </a:p>
-        </p:txBody>
-      </p:sp>
-      <p:sp>
-        <p:nvSpPr>
-          <p:cNvPr id="8" name="Text 6"/>
-          <p:cNvSpPr/>
-          <p:nvPr/>
-        </p:nvSpPr>
-        <p:spPr>
-          <a:xfrm>
-            <a:off x="1600200" y="2368296"/>
-            <a:ext cx="9784080" cy="329184"/>
-          </a:xfrm>
-          <a:prstGeom prst="rect">
-            <a:avLst/>
-          </a:prstGeom>
-          <a:noFill/>
-          <a:ln/>
-        </p:spPr>
-        <p:txBody>
-          <a:bodyPr wrap="square" lIns="0" tIns="0" rIns="0" bIns="0" rtlCol="0" anchor="ctr"/>
-          <a:lstStyle/>
-          <a:p>
-            <a:pPr indent="0" marL="0">
-              <a:buNone/>
-            </a:pPr>
-            <a:r>
-              <a:rPr lang="en-US" sz="1300" dirty="0">
-                <a:solidFill>
-                  <a:srgbClr val="5C7378"/>
-                </a:solidFill>
-                <a:latin typeface="Calibri" pitchFamily="34" charset="0"/>
-                <a:ea typeface="Calibri" pitchFamily="34" charset="-122"/>
-                <a:cs typeface="Calibri" pitchFamily="34" charset="-120"/>
-              </a:rPr>
-              <a:t>~1 run in 10, a different set of tests each time. Root cause not yet found.</a:t>
-            </a:r>
-            <a:endParaRPr lang="en-US" sz="1300" dirty="0"/>
-          </a:p>
-        </p:txBody>
-      </p:sp>
-      <p:sp>
-        <p:nvSpPr>
-          <p:cNvPr id="9" name="Shape 7"/>
-          <p:cNvSpPr/>
-          <p:nvPr/>
-        </p:nvSpPr>
-        <p:spPr>
-          <a:xfrm>
-            <a:off x="640080" y="2971800"/>
-            <a:ext cx="10881360" cy="960120"/>
-          </a:xfrm>
-          <a:prstGeom prst="roundRect">
-            <a:avLst>
-              <a:gd name="adj" fmla="val 7619"/>
-            </a:avLst>
-          </a:prstGeom>
-          <a:solidFill>
-            <a:srgbClr val="F4F8F8"/>
-          </a:solidFill>
-          <a:ln w="12700">
-            <a:solidFill>
-              <a:srgbClr val="DCE6E7"/>
-            </a:solidFill>
-            <a:prstDash val="solid"/>
-          </a:ln>
-        </p:spPr>
-      </p:sp>
-      <p:sp>
-        <p:nvSpPr>
-          <p:cNvPr id="10" name="Shape 8"/>
-          <p:cNvSpPr/>
-          <p:nvPr/>
-        </p:nvSpPr>
-        <p:spPr>
-          <a:xfrm>
-            <a:off x="914400" y="3227832"/>
-            <a:ext cx="438912" cy="438912"/>
-          </a:xfrm>
-          <a:prstGeom prst="ellipse">
-            <a:avLst/>
-          </a:prstGeom>
-          <a:solidFill>
-            <a:srgbClr val="028090"/>
-          </a:solidFill>
-          <a:ln/>
-        </p:spPr>
-      </p:sp>
-      <p:sp>
-        <p:nvSpPr>
-          <p:cNvPr id="11" name="Text 9"/>
-          <p:cNvSpPr/>
-          <p:nvPr/>
-        </p:nvSpPr>
-        <p:spPr>
-          <a:xfrm>
-            <a:off x="914400" y="3227832"/>
-            <a:ext cx="438912" cy="438912"/>
-          </a:xfrm>
-          <a:prstGeom prst="rect">
-            <a:avLst/>
-          </a:prstGeom>
-          <a:noFill/>
-          <a:ln/>
-        </p:spPr>
-        <p:txBody>
-          <a:bodyPr wrap="square" lIns="0" tIns="0" rIns="0" bIns="0" rtlCol="0" anchor="ctr"/>
-          <a:lstStyle/>
-          <a:p>
-            <a:pPr algn="ctr" indent="0" marL="0">
-              <a:buNone/>
-            </a:pPr>
-            <a:r>
-              <a:rPr lang="en-US" sz="1400" b="1" dirty="0">
-                <a:solidFill>
-                  <a:srgbClr val="FFFFFF"/>
-                </a:solidFill>
-                <a:latin typeface="Calibri" pitchFamily="34" charset="0"/>
-                <a:ea typeface="Calibri" pitchFamily="34" charset="-122"/>
-                <a:cs typeface="Calibri" pitchFamily="34" charset="-120"/>
-              </a:rPr>
-              <a:t>›</a:t>
-            </a:r>
-            <a:endParaRPr lang="en-US" sz="1400" dirty="0"/>
-          </a:p>
-        </p:txBody>
-      </p:sp>
-      <p:sp>
-        <p:nvSpPr>
-          <p:cNvPr id="12" name="Text 10"/>
-          <p:cNvSpPr/>
-          <p:nvPr/>
-        </p:nvSpPr>
-        <p:spPr>
-          <a:xfrm>
-            <a:off x="1600200" y="3118104"/>
-            <a:ext cx="9784080" cy="329184"/>
-          </a:xfrm>
-          <a:prstGeom prst="rect">
-            <a:avLst/>
-          </a:prstGeom>
-          <a:noFill/>
-          <a:ln/>
-        </p:spPr>
-        <p:txBody>
-          <a:bodyPr wrap="square" lIns="0" tIns="0" rIns="0" bIns="0" rtlCol="0" anchor="ctr"/>
-          <a:lstStyle/>
-          <a:p>
-            <a:pPr indent="0" marL="0">
-              <a:buNone/>
-            </a:pPr>
-            <a:r>
-              <a:rPr lang="en-US" sz="1600" b="1" dirty="0">
-                <a:solidFill>
-                  <a:srgbClr val="13272B"/>
-                </a:solidFill>
-                <a:latin typeface="Calibri" pitchFamily="34" charset="0"/>
-                <a:ea typeface="Calibri" pitchFamily="34" charset="-122"/>
-                <a:cs typeface="Calibri" pitchFamily="34" charset="-120"/>
-              </a:rPr>
-              <a:t>Record the second model call</a:t>
-            </a:r>
-            <a:endParaRPr lang="en-US" sz="1600" dirty="0"/>
-          </a:p>
-        </p:txBody>
-      </p:sp>
-      <p:sp>
-        <p:nvSpPr>
-          <p:cNvPr id="13" name="Text 11"/>
-          <p:cNvSpPr/>
-          <p:nvPr/>
-        </p:nvSpPr>
-        <p:spPr>
-          <a:xfrm>
-            <a:off x="1600200" y="3465576"/>
-            <a:ext cx="9784080" cy="329184"/>
-          </a:xfrm>
-          <a:prstGeom prst="rect">
-            <a:avLst/>
-          </a:prstGeom>
-          <a:noFill/>
-          <a:ln/>
-        </p:spPr>
-        <p:txBody>
-          <a:bodyPr wrap="square" lIns="0" tIns="0" rIns="0" bIns="0" rtlCol="0" anchor="ctr"/>
-          <a:lstStyle/>
-          <a:p>
-            <a:pPr indent="0" marL="0">
-              <a:buNone/>
-            </a:pPr>
-            <a:r>
-              <a:rPr lang="en-US" sz="1300" dirty="0">
-                <a:solidFill>
-                  <a:srgbClr val="5C7378"/>
-                </a:solidFill>
-                <a:latin typeface="Calibri" pitchFamily="34" charset="0"/>
-                <a:ea typeface="Calibri" pitchFamily="34" charset="-122"/>
-                <a:cs typeface="Calibri" pitchFamily="34" charset="-120"/>
-              </a:rPr>
-              <a:t>So trade-name matching works fully offline, not just extraction.</a:t>
-            </a:r>
-            <a:endParaRPr lang="en-US" sz="1300" dirty="0"/>
-          </a:p>
-        </p:txBody>
-      </p:sp>
-      <p:sp>
-        <p:nvSpPr>
-          <p:cNvPr id="14" name="Shape 12"/>
-          <p:cNvSpPr/>
-          <p:nvPr/>
-        </p:nvSpPr>
-        <p:spPr>
-          <a:xfrm>
-            <a:off x="640080" y="4069080"/>
-            <a:ext cx="10881360" cy="960120"/>
-          </a:xfrm>
-          <a:prstGeom prst="roundRect">
-            <a:avLst>
-              <a:gd name="adj" fmla="val 7619"/>
-            </a:avLst>
-          </a:prstGeom>
-          <a:solidFill>
-            <a:srgbClr val="F4F8F8"/>
-          </a:solidFill>
-          <a:ln w="12700">
-            <a:solidFill>
-              <a:srgbClr val="DCE6E7"/>
-            </a:solidFill>
-            <a:prstDash val="solid"/>
-          </a:ln>
-        </p:spPr>
-      </p:sp>
-      <p:sp>
-        <p:nvSpPr>
-          <p:cNvPr id="15" name="Shape 13"/>
-          <p:cNvSpPr/>
-          <p:nvPr/>
-        </p:nvSpPr>
-        <p:spPr>
-          <a:xfrm>
-            <a:off x="914400" y="4325112"/>
-            <a:ext cx="438912" cy="438912"/>
-          </a:xfrm>
-          <a:prstGeom prst="ellipse">
-            <a:avLst/>
-          </a:prstGeom>
-          <a:solidFill>
-            <a:srgbClr val="028090"/>
-          </a:solidFill>
-          <a:ln/>
-        </p:spPr>
-      </p:sp>
-      <p:sp>
-        <p:nvSpPr>
-          <p:cNvPr id="16" name="Text 14"/>
-          <p:cNvSpPr/>
-          <p:nvPr/>
-        </p:nvSpPr>
-        <p:spPr>
-          <a:xfrm>
-            <a:off x="914400" y="4325112"/>
-            <a:ext cx="438912" cy="438912"/>
-          </a:xfrm>
-          <a:prstGeom prst="rect">
-            <a:avLst/>
-          </a:prstGeom>
-          <a:noFill/>
-          <a:ln/>
-        </p:spPr>
-        <p:txBody>
-          <a:bodyPr wrap="square" lIns="0" tIns="0" rIns="0" bIns="0" rtlCol="0" anchor="ctr"/>
-          <a:lstStyle/>
-          <a:p>
-            <a:pPr algn="ctr" indent="0" marL="0">
-              <a:buNone/>
-            </a:pPr>
-            <a:r>
-              <a:rPr lang="en-US" sz="1400" b="1" dirty="0">
-                <a:solidFill>
-                  <a:srgbClr val="FFFFFF"/>
-                </a:solidFill>
-                <a:latin typeface="Calibri" pitchFamily="34" charset="0"/>
-                <a:ea typeface="Calibri" pitchFamily="34" charset="-122"/>
-                <a:cs typeface="Calibri" pitchFamily="34" charset="-120"/>
-              </a:rPr>
-              <a:t>›</a:t>
-            </a:r>
-            <a:endParaRPr lang="en-US" sz="1400" dirty="0"/>
-          </a:p>
-        </p:txBody>
-      </p:sp>
-      <p:sp>
-        <p:nvSpPr>
-          <p:cNvPr id="17" name="Text 15"/>
-          <p:cNvSpPr/>
-          <p:nvPr/>
-        </p:nvSpPr>
-        <p:spPr>
-          <a:xfrm>
-            <a:off x="1600200" y="4215384"/>
-            <a:ext cx="9784080" cy="329184"/>
-          </a:xfrm>
-          <a:prstGeom prst="rect">
-            <a:avLst/>
-          </a:prstGeom>
-          <a:noFill/>
-          <a:ln/>
-        </p:spPr>
-        <p:txBody>
-          <a:bodyPr wrap="square" lIns="0" tIns="0" rIns="0" bIns="0" rtlCol="0" anchor="ctr"/>
-          <a:lstStyle/>
-          <a:p>
-            <a:pPr indent="0" marL="0">
-              <a:buNone/>
-            </a:pPr>
-            <a:r>
-              <a:rPr lang="en-US" sz="1600" b="1" dirty="0">
-                <a:solidFill>
-                  <a:srgbClr val="13272B"/>
-                </a:solidFill>
-                <a:latin typeface="Calibri" pitchFamily="34" charset="0"/>
-                <a:ea typeface="Calibri" pitchFamily="34" charset="-122"/>
-                <a:cs typeface="Calibri" pitchFamily="34" charset="-120"/>
-              </a:rPr>
-              <a:t>Read the invoice pack column</a:t>
-            </a:r>
-            <a:endParaRPr lang="en-US" sz="1600" dirty="0"/>
-          </a:p>
-        </p:txBody>
-      </p:sp>
-      <p:sp>
-        <p:nvSpPr>
-          <p:cNvPr id="18" name="Text 16"/>
-          <p:cNvSpPr/>
-          <p:nvPr/>
-        </p:nvSpPr>
-        <p:spPr>
-          <a:xfrm>
-            <a:off x="1600200" y="4562856"/>
-            <a:ext cx="9784080" cy="329184"/>
-          </a:xfrm>
-          <a:prstGeom prst="rect">
-            <a:avLst/>
-          </a:prstGeom>
-          <a:noFill/>
-          <a:ln/>
-        </p:spPr>
-        <p:txBody>
-          <a:bodyPr wrap="square" lIns="0" tIns="0" rIns="0" bIns="0" rtlCol="0" anchor="ctr"/>
-          <a:lstStyle/>
-          <a:p>
-            <a:pPr indent="0" marL="0">
-              <a:buNone/>
-            </a:pPr>
-            <a:r>
-              <a:rPr lang="en-US" sz="1300" dirty="0">
-                <a:solidFill>
-                  <a:srgbClr val="5C7378"/>
-                </a:solidFill>
-                <a:latin typeface="Calibri" pitchFamily="34" charset="0"/>
-                <a:ea typeface="Calibri" pitchFamily="34" charset="-122"/>
-                <a:cs typeface="Calibri" pitchFamily="34" charset="-120"/>
-              </a:rPr>
-              <a:t>Resolves the remaining ambiguous matches.</a:t>
-            </a:r>
-            <a:endParaRPr lang="en-US" sz="1300" dirty="0"/>
-          </a:p>
-        </p:txBody>
-      </p:sp>
-      <p:sp>
-        <p:nvSpPr>
-          <p:cNvPr id="19" name="Shape 17"/>
-          <p:cNvSpPr/>
-          <p:nvPr/>
-        </p:nvSpPr>
-        <p:spPr>
-          <a:xfrm>
-            <a:off x="640080" y="5166360"/>
-            <a:ext cx="10881360" cy="960120"/>
-          </a:xfrm>
-          <a:prstGeom prst="roundRect">
-            <a:avLst>
-              <a:gd name="adj" fmla="val 7619"/>
-            </a:avLst>
-          </a:prstGeom>
-          <a:solidFill>
-            <a:srgbClr val="F4F8F8"/>
-          </a:solidFill>
-          <a:ln w="12700">
-            <a:solidFill>
-              <a:srgbClr val="DCE6E7"/>
-            </a:solidFill>
-            <a:prstDash val="solid"/>
-          </a:ln>
-        </p:spPr>
-      </p:sp>
-      <p:sp>
-        <p:nvSpPr>
-          <p:cNvPr id="20" name="Shape 18"/>
-          <p:cNvSpPr/>
-          <p:nvPr/>
-        </p:nvSpPr>
-        <p:spPr>
-          <a:xfrm>
-            <a:off x="914400" y="5422392"/>
-            <a:ext cx="438912" cy="438912"/>
-          </a:xfrm>
-          <a:prstGeom prst="ellipse">
-            <a:avLst/>
-          </a:prstGeom>
-          <a:solidFill>
-            <a:srgbClr val="5C7378"/>
-          </a:solidFill>
-          <a:ln/>
-        </p:spPr>
-      </p:sp>
-      <p:sp>
-        <p:nvSpPr>
-          <p:cNvPr id="21" name="Text 19"/>
-          <p:cNvSpPr/>
-          <p:nvPr/>
-        </p:nvSpPr>
-        <p:spPr>
-          <a:xfrm>
-            <a:off x="914400" y="5422392"/>
-            <a:ext cx="438912" cy="438912"/>
-          </a:xfrm>
-          <a:prstGeom prst="rect">
-            <a:avLst/>
-          </a:prstGeom>
-          <a:noFill/>
-          <a:ln/>
-        </p:spPr>
-        <p:txBody>
-          <a:bodyPr wrap="square" lIns="0" tIns="0" rIns="0" bIns="0" rtlCol="0" anchor="ctr"/>
-          <a:lstStyle/>
-          <a:p>
-            <a:pPr algn="ctr" indent="0" marL="0">
-              <a:buNone/>
-            </a:pPr>
-            <a:r>
-              <a:rPr lang="en-US" sz="1400" b="1" dirty="0">
-                <a:solidFill>
-                  <a:srgbClr val="FFFFFF"/>
-                </a:solidFill>
-                <a:latin typeface="Calibri" pitchFamily="34" charset="0"/>
-                <a:ea typeface="Calibri" pitchFamily="34" charset="-122"/>
-                <a:cs typeface="Calibri" pitchFamily="34" charset="-120"/>
-              </a:rPr>
-              <a:t>›</a:t>
-            </a:r>
-            <a:endParaRPr lang="en-US" sz="1400" dirty="0"/>
-          </a:p>
-        </p:txBody>
-      </p:sp>
-      <p:sp>
-        <p:nvSpPr>
-          <p:cNvPr id="22" name="Text 20"/>
-          <p:cNvSpPr/>
-          <p:nvPr/>
-        </p:nvSpPr>
-        <p:spPr>
-          <a:xfrm>
-            <a:off x="1600200" y="5312664"/>
-            <a:ext cx="9784080" cy="329184"/>
-          </a:xfrm>
-          <a:prstGeom prst="rect">
-            <a:avLst/>
-          </a:prstGeom>
-          <a:noFill/>
-          <a:ln/>
-        </p:spPr>
-        <p:txBody>
-          <a:bodyPr wrap="square" lIns="0" tIns="0" rIns="0" bIns="0" rtlCol="0" anchor="ctr"/>
-          <a:lstStyle/>
-          <a:p>
-            <a:pPr indent="0" marL="0">
-              <a:buNone/>
-            </a:pPr>
-            <a:r>
-              <a:rPr lang="en-US" sz="1600" b="1" dirty="0">
-                <a:solidFill>
-                  <a:srgbClr val="13272B"/>
-                </a:solidFill>
-                <a:latin typeface="Calibri" pitchFamily="34" charset="0"/>
-                <a:ea typeface="Calibri" pitchFamily="34" charset="-122"/>
-                <a:cs typeface="Calibri" pitchFamily="34" charset="-120"/>
-              </a:rPr>
-              <a:t>Natural-language reporting</a:t>
-            </a:r>
-            <a:endParaRPr lang="en-US" sz="1600" dirty="0"/>
-          </a:p>
-        </p:txBody>
-      </p:sp>
-      <p:sp>
-        <p:nvSpPr>
-          <p:cNvPr id="23" name="Text 21"/>
-          <p:cNvSpPr/>
-          <p:nvPr/>
-        </p:nvSpPr>
-        <p:spPr>
-          <a:xfrm>
-            <a:off x="1600200" y="5660136"/>
-            <a:ext cx="9784080" cy="329184"/>
-          </a:xfrm>
-          <a:prstGeom prst="rect">
-            <a:avLst/>
-          </a:prstGeom>
-          <a:noFill/>
-          <a:ln/>
-        </p:spPr>
-        <p:txBody>
-          <a:bodyPr wrap="square" lIns="0" tIns="0" rIns="0" bIns="0" rtlCol="0" anchor="ctr"/>
-          <a:lstStyle/>
-          <a:p>
-            <a:pPr indent="0" marL="0">
-              <a:buNone/>
-            </a:pPr>
-            <a:r>
-              <a:rPr lang="en-US" sz="1300" dirty="0">
-                <a:solidFill>
-                  <a:srgbClr val="5C7378"/>
-                </a:solidFill>
-                <a:latin typeface="Calibri" pitchFamily="34" charset="0"/>
-                <a:ea typeface="Calibri" pitchFamily="34" charset="-122"/>
-                <a:cs typeface="Calibri" pitchFamily="34" charset="-120"/>
-              </a:rPr>
-              <a:t>Designed, and flagged in-product as not built.</a:t>
-            </a:r>
-            <a:endParaRPr lang="en-US" sz="1300" dirty="0"/>
-          </a:p>
-        </p:txBody>
-      </p:sp>
-    </p:spTree>
-  </p:cSld>
-  <p:clrMapOvr>
-    <a:masterClrMapping/>
-  </p:clrMapOvr>
-</p:sld>
-</file>
-
-<file path=ppt/slides/slide18.xml><?xml version="1.0" encoding="utf-8"?>
-<p:sld xmlns:a="http://schemas.openxmlformats.org/drawingml/2006/main" xmlns:r="http://schemas.openxmlformats.org/officeDocument/2006/relationships" xmlns:p="http://schemas.openxmlformats.org/presentationml/2006/main">
-  <p:cSld name="Slide 18">
-    <p:bg>
-      <p:bgPr>
-        <a:solidFill>
-          <a:srgbClr val="0B3A3E"/>
-        </a:solidFill>
-      </p:bgPr>
-    </p:bg>
-    <p:spTree>
-      <p:nvGrpSpPr>
-        <p:cNvPr id="1" name=""/>
-        <p:cNvGrpSpPr/>
-        <p:nvPr/>
-      </p:nvGrpSpPr>
-      <p:grpSpPr>
-        <a:xfrm>
-          <a:off x="0" y="0"/>
-          <a:ext cx="0" cy="0"/>
-          <a:chOff x="0" y="0"/>
-          <a:chExt cx="0" cy="0"/>
-        </a:xfrm>
-      </p:grpSpPr>
-      <p:sp>
-        <p:nvSpPr>
-          <p:cNvPr id="2" name="Text 0"/>
-          <p:cNvSpPr/>
-          <p:nvPr/>
-        </p:nvSpPr>
-        <p:spPr>
-          <a:xfrm>
-            <a:off x="640080" y="1371600"/>
-            <a:ext cx="10058400" cy="365760"/>
-          </a:xfrm>
-          <a:prstGeom prst="rect">
-            <a:avLst/>
-          </a:prstGeom>
-          <a:noFill/>
-          <a:ln/>
-        </p:spPr>
-        <p:txBody>
-          <a:bodyPr wrap="square" lIns="0" tIns="0" rIns="0" bIns="0" rtlCol="0" anchor="ctr"/>
-          <a:lstStyle/>
-          <a:p>
-            <a:pPr indent="0" marL="0">
-              <a:buNone/>
-            </a:pPr>
-            <a:r>
-              <a:rPr lang="en-US" sz="1400" b="1" spc="200" kern="0" dirty="0">
-                <a:solidFill>
-                  <a:srgbClr val="02C39A"/>
-                </a:solidFill>
-                <a:latin typeface="Calibri" pitchFamily="34" charset="0"/>
-                <a:ea typeface="Calibri" pitchFamily="34" charset="-122"/>
-                <a:cs typeface="Calibri" pitchFamily="34" charset="-120"/>
-              </a:rPr>
-              <a:t>IN ONE SENTENCE</a:t>
-            </a:r>
-            <a:endParaRPr lang="en-US" sz="1400" dirty="0"/>
-          </a:p>
-        </p:txBody>
-      </p:sp>
-      <p:sp>
-        <p:nvSpPr>
-          <p:cNvPr id="3" name="Text 1"/>
-          <p:cNvSpPr/>
-          <p:nvPr/>
-        </p:nvSpPr>
-        <p:spPr>
-          <a:xfrm>
-            <a:off x="640080" y="2148840"/>
-            <a:ext cx="10881360" cy="2651760"/>
-          </a:xfrm>
-          <a:prstGeom prst="rect">
-            <a:avLst/>
-          </a:prstGeom>
-          <a:noFill/>
-          <a:ln/>
-        </p:spPr>
-        <p:txBody>
-          <a:bodyPr wrap="square" lIns="0" tIns="0" rIns="0" bIns="0" rtlCol="0" anchor="ctr"/>
-          <a:lstStyle/>
-          <a:p>
-            <a:pPr indent="0" marL="0">
-              <a:lnSpc>
-                <a:spcPts val="4200"/>
-              </a:lnSpc>
-              <a:buNone/>
-            </a:pPr>
-            <a:r>
-              <a:rPr lang="en-US" sz="2700" b="1" dirty="0">
-                <a:solidFill>
-                  <a:srgbClr val="FFFFFF"/>
-                </a:solidFill>
-                <a:latin typeface="Cambria" pitchFamily="34" charset="0"/>
-                <a:ea typeface="Cambria" pitchFamily="34" charset="-122"/>
-                <a:cs typeface="Cambria" pitchFamily="34" charset="-120"/>
-              </a:rPr>
-              <a:t>The guarantees hold because of how the system is built —</a:t>
-            </a:r>
-            <a:endParaRPr lang="en-US" sz="2700" dirty="0"/>
-          </a:p>
-          <a:p>
-            <a:pPr indent="0" marL="0">
-              <a:lnSpc>
-                <a:spcPts val="4200"/>
-              </a:lnSpc>
-              <a:buNone/>
-            </a:pPr>
-            <a:r>
-              <a:rPr lang="en-US" sz="2700" b="1" dirty="0">
-                <a:solidFill>
-                  <a:srgbClr val="FFFFFF"/>
-                </a:solidFill>
-                <a:latin typeface="Cambria" pitchFamily="34" charset="0"/>
-                <a:ea typeface="Cambria" pitchFamily="34" charset="-122"/>
-                <a:cs typeface="Cambria" pitchFamily="34" charset="-120"/>
-              </a:rPr>
-              <a:t>an append-only ledger the database itself protects,</a:t>
-            </a:r>
-            <a:endParaRPr lang="en-US" sz="2700" dirty="0"/>
-          </a:p>
-          <a:p>
-            <a:pPr indent="0" marL="0">
-              <a:lnSpc>
-                <a:spcPts val="4200"/>
-              </a:lnSpc>
-              <a:buNone/>
-            </a:pPr>
-            <a:r>
-              <a:rPr lang="en-US" sz="2700" b="1" dirty="0">
-                <a:solidFill>
-                  <a:srgbClr val="FFFFFF"/>
-                </a:solidFill>
-                <a:latin typeface="Cambria" pitchFamily="34" charset="0"/>
-                <a:ea typeface="Cambria" pitchFamily="34" charset="-122"/>
-                <a:cs typeface="Cambria" pitchFamily="34" charset="-120"/>
-              </a:rPr>
-              <a:t>and a model that can only produce something checkable —</a:t>
-            </a:r>
-            <a:endParaRPr lang="en-US" sz="2700" dirty="0"/>
-          </a:p>
-          <a:p>
-            <a:pPr indent="0" marL="0">
-              <a:lnSpc>
-                <a:spcPts val="4200"/>
-              </a:lnSpc>
-              <a:buNone/>
-            </a:pPr>
-            <a:r>
-              <a:rPr lang="en-US" sz="2700" b="1" dirty="0">
-                <a:solidFill>
-                  <a:srgbClr val="FFFFFF"/>
-                </a:solidFill>
-                <a:latin typeface="Cambria" pitchFamily="34" charset="0"/>
-                <a:ea typeface="Cambria" pitchFamily="34" charset="-122"/>
-                <a:cs typeface="Cambria" pitchFamily="34" charset="-120"/>
-              </a:rPr>
-              <a:t>not because everyone remembered to be careful.</a:t>
-            </a:r>
-            <a:endParaRPr lang="en-US" sz="2700" dirty="0"/>
-          </a:p>
-        </p:txBody>
-      </p:sp>
-      <p:sp>
-        <p:nvSpPr>
-          <p:cNvPr id="4" name="Shape 2"/>
-          <p:cNvSpPr/>
-          <p:nvPr/>
-        </p:nvSpPr>
-        <p:spPr>
-          <a:xfrm>
-            <a:off x="640080" y="5257800"/>
-            <a:ext cx="502920" cy="502920"/>
-          </a:xfrm>
-          <a:prstGeom prst="ellipse">
-            <a:avLst/>
-          </a:prstGeom>
-          <a:solidFill>
-            <a:srgbClr val="028090"/>
-          </a:solidFill>
-          <a:ln/>
-        </p:spPr>
-      </p:sp>
-      <p:sp>
-        <p:nvSpPr>
-          <p:cNvPr id="5" name="Text 3"/>
-          <p:cNvSpPr/>
-          <p:nvPr/>
-        </p:nvSpPr>
-        <p:spPr>
-          <a:xfrm>
-            <a:off x="640080" y="5257800"/>
-            <a:ext cx="502920" cy="502920"/>
-          </a:xfrm>
-          <a:prstGeom prst="rect">
-            <a:avLst/>
-          </a:prstGeom>
-          <a:noFill/>
-          <a:ln/>
-        </p:spPr>
-        <p:txBody>
-          <a:bodyPr wrap="square" lIns="0" tIns="0" rIns="0" bIns="0" rtlCol="0" anchor="ctr"/>
-          <a:lstStyle/>
-          <a:p>
-            <a:pPr algn="ctr" indent="0" marL="0">
-              <a:buNone/>
-            </a:pPr>
-            <a:r>
-              <a:rPr lang="en-US" sz="1800" b="1" dirty="0">
-                <a:solidFill>
-                  <a:srgbClr val="FFFFFF"/>
-                </a:solidFill>
-                <a:latin typeface="Cambria" pitchFamily="34" charset="0"/>
-                <a:ea typeface="Cambria" pitchFamily="34" charset="-122"/>
-                <a:cs typeface="Cambria" pitchFamily="34" charset="-120"/>
-              </a:rPr>
-              <a:t>Rx</a:t>
-            </a:r>
-            <a:endParaRPr lang="en-US" sz="1800" dirty="0"/>
-          </a:p>
-        </p:txBody>
-      </p:sp>
-      <p:sp>
-        <p:nvSpPr>
-          <p:cNvPr id="6" name="Text 4"/>
-          <p:cNvSpPr/>
-          <p:nvPr/>
-        </p:nvSpPr>
-        <p:spPr>
-          <a:xfrm>
-            <a:off x="1353312" y="5257800"/>
-            <a:ext cx="5486400" cy="502920"/>
-          </a:xfrm>
-          <a:prstGeom prst="rect">
-            <a:avLst/>
-          </a:prstGeom>
-          <a:noFill/>
-          <a:ln/>
-        </p:spPr>
-        <p:txBody>
-          <a:bodyPr wrap="square" lIns="0" tIns="0" rIns="0" bIns="0" rtlCol="0" anchor="ctr"/>
-          <a:lstStyle/>
-          <a:p>
-            <a:pPr indent="0" marL="0">
-              <a:buNone/>
-            </a:pPr>
-            <a:r>
-              <a:rPr lang="en-US" sz="2600" b="1" dirty="0">
-                <a:solidFill>
-                  <a:srgbClr val="02C39A"/>
-                </a:solidFill>
-                <a:latin typeface="Cambria" pitchFamily="34" charset="0"/>
-                <a:ea typeface="Cambria" pitchFamily="34" charset="-122"/>
-                <a:cs typeface="Cambria" pitchFamily="34" charset="-120"/>
-              </a:rPr>
-              <a:t>Questions</a:t>
-            </a:r>
-            <a:endParaRPr lang="en-US" sz="2600" dirty="0"/>
           </a:p>
         </p:txBody>
       </p:sp>
@@ -9057,6 +10600,1207 @@
               <a:t>Analysis is genuinely useful here — but an AI that can silently alter regulated stock is a liability.</a:t>
             </a:r>
             <a:endParaRPr lang="en-US" sz="1300" dirty="0"/>
+          </a:p>
+        </p:txBody>
+      </p:sp>
+    </p:spTree>
+  </p:cSld>
+  <p:clrMapOvr>
+    <a:masterClrMapping/>
+  </p:clrMapOvr>
+</p:sld>
+</file>
+
+<file path=ppt/slides/slide20.xml><?xml version="1.0" encoding="utf-8"?>
+<p:sld xmlns:a="http://schemas.openxmlformats.org/drawingml/2006/main" xmlns:r="http://schemas.openxmlformats.org/officeDocument/2006/relationships" xmlns:p="http://schemas.openxmlformats.org/presentationml/2006/main">
+  <p:cSld name="Slide 17">
+    <p:bg>
+      <p:bgPr>
+        <a:solidFill>
+          <a:srgbClr val="FFFFFF"/>
+        </a:solidFill>
+      </p:bgPr>
+    </p:bg>
+    <p:spTree>
+      <p:nvGrpSpPr>
+        <p:cNvPr id="1" name=""/>
+        <p:cNvGrpSpPr/>
+        <p:nvPr/>
+      </p:nvGrpSpPr>
+      <p:grpSpPr>
+        <a:xfrm>
+          <a:off x="0" y="0"/>
+          <a:ext cx="0" cy="0"/>
+          <a:chOff x="0" y="0"/>
+          <a:chExt cx="0" cy="0"/>
+        </a:xfrm>
+      </p:grpSpPr>
+      <p:sp>
+        <p:nvSpPr>
+          <p:cNvPr id="2" name="Text 0"/>
+          <p:cNvSpPr/>
+          <p:nvPr/>
+        </p:nvSpPr>
+        <p:spPr>
+          <a:xfrm>
+            <a:off x="640080" y="384048"/>
+            <a:ext cx="7315200" cy="256032"/>
+          </a:xfrm>
+          <a:prstGeom prst="rect">
+            <a:avLst/>
+          </a:prstGeom>
+          <a:noFill/>
+          <a:ln/>
+        </p:spPr>
+        <p:txBody>
+          <a:bodyPr wrap="square" lIns="0" tIns="0" rIns="0" bIns="0" rtlCol="0" anchor="ctr"/>
+          <a:lstStyle/>
+          <a:p>
+            <a:pPr indent="0" marL="0">
+              <a:buNone/>
+            </a:pPr>
+            <a:r>
+              <a:rPr lang="en-US" sz="1200" b="1" spc="200" kern="0" dirty="0">
+                <a:solidFill>
+                  <a:srgbClr val="00A896"/>
+                </a:solidFill>
+                <a:latin typeface="Calibri" pitchFamily="34" charset="0"/>
+                <a:ea typeface="Calibri" pitchFamily="34" charset="-122"/>
+                <a:cs typeface="Calibri" pitchFamily="34" charset="-120"/>
+              </a:rPr>
+              <a:t>LIMITATIONS &amp; ROADMAP</a:t>
+            </a:r>
+            <a:endParaRPr lang="en-US" sz="1200" dirty="0"/>
+          </a:p>
+        </p:txBody>
+      </p:sp>
+      <p:sp>
+        <p:nvSpPr>
+          <p:cNvPr id="3" name="Text 1"/>
+          <p:cNvSpPr/>
+          <p:nvPr/>
+        </p:nvSpPr>
+        <p:spPr>
+          <a:xfrm>
+            <a:off x="640080" y="658368"/>
+            <a:ext cx="10881360" cy="777240"/>
+          </a:xfrm>
+          <a:prstGeom prst="rect">
+            <a:avLst/>
+          </a:prstGeom>
+          <a:noFill/>
+          <a:ln/>
+        </p:spPr>
+        <p:txBody>
+          <a:bodyPr wrap="square" lIns="0" tIns="0" rIns="0" bIns="0" rtlCol="0" anchor="ctr"/>
+          <a:lstStyle/>
+          <a:p>
+            <a:pPr indent="0" marL="0">
+              <a:buNone/>
+            </a:pPr>
+            <a:r>
+              <a:rPr lang="en-US" sz="3600" b="1" dirty="0">
+                <a:solidFill>
+                  <a:srgbClr val="13272B"/>
+                </a:solidFill>
+                <a:latin typeface="Cambria" pitchFamily="34" charset="0"/>
+                <a:ea typeface="Cambria" pitchFamily="34" charset="-122"/>
+                <a:cs typeface="Cambria" pitchFamily="34" charset="-120"/>
+              </a:rPr>
+              <a:t>What we would do next</a:t>
+            </a:r>
+            <a:endParaRPr lang="en-US" sz="3600" dirty="0"/>
+          </a:p>
+        </p:txBody>
+      </p:sp>
+      <p:sp>
+        <p:nvSpPr>
+          <p:cNvPr id="4" name="Shape 2"/>
+          <p:cNvSpPr/>
+          <p:nvPr/>
+        </p:nvSpPr>
+        <p:spPr>
+          <a:xfrm>
+            <a:off x="640080" y="1737360"/>
+            <a:ext cx="10881360" cy="841248"/>
+          </a:xfrm>
+          <a:prstGeom prst="roundRect">
+            <a:avLst>
+              <a:gd name="adj" fmla="val 7619"/>
+            </a:avLst>
+          </a:prstGeom>
+          <a:solidFill>
+            <a:srgbClr val="F4F8F8"/>
+          </a:solidFill>
+          <a:ln w="12700">
+            <a:solidFill>
+              <a:srgbClr val="DCE6E7"/>
+            </a:solidFill>
+            <a:prstDash val="solid"/>
+          </a:ln>
+        </p:spPr>
+      </p:sp>
+      <p:sp>
+        <p:nvSpPr>
+          <p:cNvPr id="5" name="Shape 3"/>
+          <p:cNvSpPr/>
+          <p:nvPr/>
+        </p:nvSpPr>
+        <p:spPr>
+          <a:xfrm>
+            <a:off x="914400" y="1938528"/>
+            <a:ext cx="438912" cy="438912"/>
+          </a:xfrm>
+          <a:prstGeom prst="ellipse">
+            <a:avLst/>
+          </a:prstGeom>
+          <a:solidFill>
+            <a:srgbClr val="C77700"/>
+          </a:solidFill>
+          <a:ln/>
+        </p:spPr>
+      </p:sp>
+      <p:sp>
+        <p:nvSpPr>
+          <p:cNvPr id="6" name="Text 4"/>
+          <p:cNvSpPr/>
+          <p:nvPr/>
+        </p:nvSpPr>
+        <p:spPr>
+          <a:xfrm>
+            <a:off x="914400" y="1938528"/>
+            <a:ext cx="438912" cy="438912"/>
+          </a:xfrm>
+          <a:prstGeom prst="rect">
+            <a:avLst/>
+          </a:prstGeom>
+          <a:noFill/>
+          <a:ln/>
+        </p:spPr>
+        <p:txBody>
+          <a:bodyPr wrap="square" lIns="0" tIns="0" rIns="0" bIns="0" rtlCol="0" anchor="ctr"/>
+          <a:lstStyle/>
+          <a:p>
+            <a:pPr algn="ctr" indent="0" marL="0">
+              <a:buNone/>
+            </a:pPr>
+            <a:r>
+              <a:rPr lang="en-US" sz="1400" b="1" dirty="0">
+                <a:solidFill>
+                  <a:srgbClr val="FFFFFF"/>
+                </a:solidFill>
+                <a:latin typeface="Calibri" pitchFamily="34" charset="0"/>
+                <a:ea typeface="Calibri" pitchFamily="34" charset="-122"/>
+                <a:cs typeface="Calibri" pitchFamily="34" charset="-120"/>
+              </a:rPr>
+              <a:t>›</a:t>
+            </a:r>
+            <a:endParaRPr lang="en-US" sz="1400" dirty="0"/>
+          </a:p>
+        </p:txBody>
+      </p:sp>
+      <p:sp>
+        <p:nvSpPr>
+          <p:cNvPr id="7" name="Text 5"/>
+          <p:cNvSpPr/>
+          <p:nvPr/>
+        </p:nvSpPr>
+        <p:spPr>
+          <a:xfrm>
+            <a:off x="1600200" y="1810512"/>
+            <a:ext cx="9784080" cy="329184"/>
+          </a:xfrm>
+          <a:prstGeom prst="rect">
+            <a:avLst/>
+          </a:prstGeom>
+          <a:noFill/>
+          <a:ln/>
+        </p:spPr>
+        <p:txBody>
+          <a:bodyPr wrap="square" lIns="0" tIns="0" rIns="0" bIns="0" rtlCol="0" anchor="ctr"/>
+          <a:lstStyle/>
+          <a:p>
+            <a:pPr indent="0" marL="0">
+              <a:buNone/>
+            </a:pPr>
+            <a:r>
+              <a:rPr lang="en-US" sz="1600" b="1" dirty="0">
+                <a:solidFill>
+                  <a:srgbClr val="13272B"/>
+                </a:solidFill>
+                <a:latin typeface="Calibri" pitchFamily="34" charset="0"/>
+                <a:ea typeface="Calibri" pitchFamily="34" charset="-122"/>
+                <a:cs typeface="Calibri" pitchFamily="34" charset="-120"/>
+              </a:rPr>
+              <a:t>Fix an intermittent race in the e2e suite</a:t>
+            </a:r>
+            <a:endParaRPr lang="en-US" sz="1600" dirty="0"/>
+          </a:p>
+        </p:txBody>
+      </p:sp>
+      <p:sp>
+        <p:nvSpPr>
+          <p:cNvPr id="8" name="Text 6"/>
+          <p:cNvSpPr/>
+          <p:nvPr/>
+        </p:nvSpPr>
+        <p:spPr>
+          <a:xfrm>
+            <a:off x="1600200" y="2157984"/>
+            <a:ext cx="9784080" cy="329184"/>
+          </a:xfrm>
+          <a:prstGeom prst="rect">
+            <a:avLst/>
+          </a:prstGeom>
+          <a:noFill/>
+          <a:ln/>
+        </p:spPr>
+        <p:txBody>
+          <a:bodyPr wrap="square" lIns="0" tIns="0" rIns="0" bIns="0" rtlCol="0" anchor="ctr"/>
+          <a:lstStyle/>
+          <a:p>
+            <a:pPr indent="0" marL="0">
+              <a:buNone/>
+            </a:pPr>
+            <a:r>
+              <a:rPr lang="en-US" sz="1300" dirty="0">
+                <a:solidFill>
+                  <a:srgbClr val="5C7378"/>
+                </a:solidFill>
+                <a:latin typeface="Calibri" pitchFamily="34" charset="0"/>
+                <a:ea typeface="Calibri" pitchFamily="34" charset="-122"/>
+                <a:cs typeface="Calibri" pitchFamily="34" charset="-120"/>
+              </a:rPr>
+              <a:t>~1 run in 10, a different set of tests each time. Root cause not yet found.</a:t>
+            </a:r>
+            <a:endParaRPr lang="en-US" sz="1300" dirty="0"/>
+          </a:p>
+        </p:txBody>
+      </p:sp>
+      <p:sp>
+        <p:nvSpPr>
+          <p:cNvPr id="9" name="Shape 7"/>
+          <p:cNvSpPr/>
+          <p:nvPr/>
+        </p:nvSpPr>
+        <p:spPr>
+          <a:xfrm>
+            <a:off x="640080" y="2651760"/>
+            <a:ext cx="10881360" cy="841248"/>
+          </a:xfrm>
+          <a:prstGeom prst="roundRect">
+            <a:avLst>
+              <a:gd name="adj" fmla="val 7619"/>
+            </a:avLst>
+          </a:prstGeom>
+          <a:solidFill>
+            <a:srgbClr val="F4F8F8"/>
+          </a:solidFill>
+          <a:ln w="12700">
+            <a:solidFill>
+              <a:srgbClr val="DCE6E7"/>
+            </a:solidFill>
+            <a:prstDash val="solid"/>
+          </a:ln>
+        </p:spPr>
+      </p:sp>
+      <p:sp>
+        <p:nvSpPr>
+          <p:cNvPr id="10" name="Shape 8"/>
+          <p:cNvSpPr/>
+          <p:nvPr/>
+        </p:nvSpPr>
+        <p:spPr>
+          <a:xfrm>
+            <a:off x="914400" y="2852928"/>
+            <a:ext cx="438912" cy="438912"/>
+          </a:xfrm>
+          <a:prstGeom prst="ellipse">
+            <a:avLst/>
+          </a:prstGeom>
+          <a:solidFill>
+            <a:srgbClr val="028090"/>
+          </a:solidFill>
+          <a:ln/>
+        </p:spPr>
+      </p:sp>
+      <p:sp>
+        <p:nvSpPr>
+          <p:cNvPr id="11" name="Text 9"/>
+          <p:cNvSpPr/>
+          <p:nvPr/>
+        </p:nvSpPr>
+        <p:spPr>
+          <a:xfrm>
+            <a:off x="914400" y="2852928"/>
+            <a:ext cx="438912" cy="438912"/>
+          </a:xfrm>
+          <a:prstGeom prst="rect">
+            <a:avLst/>
+          </a:prstGeom>
+          <a:noFill/>
+          <a:ln/>
+        </p:spPr>
+        <p:txBody>
+          <a:bodyPr wrap="square" lIns="0" tIns="0" rIns="0" bIns="0" rtlCol="0" anchor="ctr"/>
+          <a:lstStyle/>
+          <a:p>
+            <a:pPr algn="ctr" indent="0" marL="0">
+              <a:buNone/>
+            </a:pPr>
+            <a:r>
+              <a:rPr lang="en-US" sz="1400" b="1" dirty="0">
+                <a:solidFill>
+                  <a:srgbClr val="FFFFFF"/>
+                </a:solidFill>
+                <a:latin typeface="Calibri" pitchFamily="34" charset="0"/>
+                <a:ea typeface="Calibri" pitchFamily="34" charset="-122"/>
+                <a:cs typeface="Calibri" pitchFamily="34" charset="-120"/>
+              </a:rPr>
+              <a:t>›</a:t>
+            </a:r>
+            <a:endParaRPr lang="en-US" sz="1400" dirty="0"/>
+          </a:p>
+        </p:txBody>
+      </p:sp>
+      <p:sp>
+        <p:nvSpPr>
+          <p:cNvPr id="12" name="Text 10"/>
+          <p:cNvSpPr/>
+          <p:nvPr/>
+        </p:nvSpPr>
+        <p:spPr>
+          <a:xfrm>
+            <a:off x="1600200" y="2724912"/>
+            <a:ext cx="9784080" cy="329184"/>
+          </a:xfrm>
+          <a:prstGeom prst="rect">
+            <a:avLst/>
+          </a:prstGeom>
+          <a:noFill/>
+          <a:ln/>
+        </p:spPr>
+        <p:txBody>
+          <a:bodyPr wrap="square" lIns="0" tIns="0" rIns="0" bIns="0" rtlCol="0" anchor="ctr"/>
+          <a:lstStyle/>
+          <a:p>
+            <a:pPr indent="0" marL="0">
+              <a:buNone/>
+            </a:pPr>
+            <a:r>
+              <a:rPr lang="en-US" sz="1600" b="1" dirty="0">
+                <a:solidFill>
+                  <a:srgbClr val="13272B"/>
+                </a:solidFill>
+                <a:latin typeface="Calibri" pitchFamily="34" charset="0"/>
+                <a:ea typeface="Calibri" pitchFamily="34" charset="-122"/>
+                <a:cs typeface="Calibri" pitchFamily="34" charset="-120"/>
+              </a:rPr>
+              <a:t>Record the second model call</a:t>
+            </a:r>
+            <a:endParaRPr lang="en-US" sz="1600" dirty="0"/>
+          </a:p>
+        </p:txBody>
+      </p:sp>
+      <p:sp>
+        <p:nvSpPr>
+          <p:cNvPr id="13" name="Text 11"/>
+          <p:cNvSpPr/>
+          <p:nvPr/>
+        </p:nvSpPr>
+        <p:spPr>
+          <a:xfrm>
+            <a:off x="1600200" y="3072384"/>
+            <a:ext cx="9784080" cy="329184"/>
+          </a:xfrm>
+          <a:prstGeom prst="rect">
+            <a:avLst/>
+          </a:prstGeom>
+          <a:noFill/>
+          <a:ln/>
+        </p:spPr>
+        <p:txBody>
+          <a:bodyPr wrap="square" lIns="0" tIns="0" rIns="0" bIns="0" rtlCol="0" anchor="ctr"/>
+          <a:lstStyle/>
+          <a:p>
+            <a:pPr indent="0" marL="0">
+              <a:buNone/>
+            </a:pPr>
+            <a:r>
+              <a:rPr lang="en-US" sz="1300" dirty="0">
+                <a:solidFill>
+                  <a:srgbClr val="5C7378"/>
+                </a:solidFill>
+                <a:latin typeface="Calibri" pitchFamily="34" charset="0"/>
+                <a:ea typeface="Calibri" pitchFamily="34" charset="-122"/>
+                <a:cs typeface="Calibri" pitchFamily="34" charset="-120"/>
+              </a:rPr>
+              <a:t>So trade-name matching works fully offline, not just extraction.</a:t>
+            </a:r>
+            <a:endParaRPr lang="en-US" sz="1300" dirty="0"/>
+          </a:p>
+        </p:txBody>
+      </p:sp>
+      <p:sp>
+        <p:nvSpPr>
+          <p:cNvPr id="14" name="Shape 12"/>
+          <p:cNvSpPr/>
+          <p:nvPr/>
+        </p:nvSpPr>
+        <p:spPr>
+          <a:xfrm>
+            <a:off x="640080" y="3566160"/>
+            <a:ext cx="10881360" cy="841248"/>
+          </a:xfrm>
+          <a:prstGeom prst="roundRect">
+            <a:avLst>
+              <a:gd name="adj" fmla="val 7619"/>
+            </a:avLst>
+          </a:prstGeom>
+          <a:solidFill>
+            <a:srgbClr val="F4F8F8"/>
+          </a:solidFill>
+          <a:ln w="12700">
+            <a:solidFill>
+              <a:srgbClr val="DCE6E7"/>
+            </a:solidFill>
+            <a:prstDash val="solid"/>
+          </a:ln>
+        </p:spPr>
+      </p:sp>
+      <p:sp>
+        <p:nvSpPr>
+          <p:cNvPr id="15" name="Shape 13"/>
+          <p:cNvSpPr/>
+          <p:nvPr/>
+        </p:nvSpPr>
+        <p:spPr>
+          <a:xfrm>
+            <a:off x="914400" y="3767328"/>
+            <a:ext cx="438912" cy="438912"/>
+          </a:xfrm>
+          <a:prstGeom prst="ellipse">
+            <a:avLst/>
+          </a:prstGeom>
+          <a:solidFill>
+            <a:srgbClr val="028090"/>
+          </a:solidFill>
+          <a:ln/>
+        </p:spPr>
+      </p:sp>
+      <p:sp>
+        <p:nvSpPr>
+          <p:cNvPr id="16" name="Text 14"/>
+          <p:cNvSpPr/>
+          <p:nvPr/>
+        </p:nvSpPr>
+        <p:spPr>
+          <a:xfrm>
+            <a:off x="914400" y="3767328"/>
+            <a:ext cx="438912" cy="438912"/>
+          </a:xfrm>
+          <a:prstGeom prst="rect">
+            <a:avLst/>
+          </a:prstGeom>
+          <a:noFill/>
+          <a:ln/>
+        </p:spPr>
+        <p:txBody>
+          <a:bodyPr wrap="square" lIns="0" tIns="0" rIns="0" bIns="0" rtlCol="0" anchor="ctr"/>
+          <a:lstStyle/>
+          <a:p>
+            <a:pPr algn="ctr" indent="0" marL="0">
+              <a:buNone/>
+            </a:pPr>
+            <a:r>
+              <a:rPr lang="en-US" sz="1400" b="1" dirty="0">
+                <a:solidFill>
+                  <a:srgbClr val="FFFFFF"/>
+                </a:solidFill>
+                <a:latin typeface="Calibri" pitchFamily="34" charset="0"/>
+                <a:ea typeface="Calibri" pitchFamily="34" charset="-122"/>
+                <a:cs typeface="Calibri" pitchFamily="34" charset="-120"/>
+              </a:rPr>
+              <a:t>›</a:t>
+            </a:r>
+            <a:endParaRPr lang="en-US" sz="1400" dirty="0"/>
+          </a:p>
+        </p:txBody>
+      </p:sp>
+      <p:sp>
+        <p:nvSpPr>
+          <p:cNvPr id="17" name="Text 15"/>
+          <p:cNvSpPr/>
+          <p:nvPr/>
+        </p:nvSpPr>
+        <p:spPr>
+          <a:xfrm>
+            <a:off x="1600200" y="3639312"/>
+            <a:ext cx="9784080" cy="329184"/>
+          </a:xfrm>
+          <a:prstGeom prst="rect">
+            <a:avLst/>
+          </a:prstGeom>
+          <a:noFill/>
+          <a:ln/>
+        </p:spPr>
+        <p:txBody>
+          <a:bodyPr wrap="square" lIns="0" tIns="0" rIns="0" bIns="0" rtlCol="0" anchor="ctr"/>
+          <a:lstStyle/>
+          <a:p>
+            <a:pPr indent="0" marL="0">
+              <a:buNone/>
+            </a:pPr>
+            <a:r>
+              <a:rPr lang="en-US" sz="1600" b="1" dirty="0">
+                <a:solidFill>
+                  <a:srgbClr val="13272B"/>
+                </a:solidFill>
+                <a:latin typeface="Calibri" pitchFamily="34" charset="0"/>
+                <a:ea typeface="Calibri" pitchFamily="34" charset="-122"/>
+                <a:cs typeface="Calibri" pitchFamily="34" charset="-120"/>
+              </a:rPr>
+              <a:t>Read the invoice pack column</a:t>
+            </a:r>
+            <a:endParaRPr lang="en-US" sz="1600" dirty="0"/>
+          </a:p>
+        </p:txBody>
+      </p:sp>
+      <p:sp>
+        <p:nvSpPr>
+          <p:cNvPr id="18" name="Text 16"/>
+          <p:cNvSpPr/>
+          <p:nvPr/>
+        </p:nvSpPr>
+        <p:spPr>
+          <a:xfrm>
+            <a:off x="1600200" y="3986784"/>
+            <a:ext cx="9784080" cy="329184"/>
+          </a:xfrm>
+          <a:prstGeom prst="rect">
+            <a:avLst/>
+          </a:prstGeom>
+          <a:noFill/>
+          <a:ln/>
+        </p:spPr>
+        <p:txBody>
+          <a:bodyPr wrap="square" lIns="0" tIns="0" rIns="0" bIns="0" rtlCol="0" anchor="ctr"/>
+          <a:lstStyle/>
+          <a:p>
+            <a:pPr indent="0" marL="0">
+              <a:buNone/>
+            </a:pPr>
+            <a:r>
+              <a:rPr lang="en-US" sz="1300" dirty="0">
+                <a:solidFill>
+                  <a:srgbClr val="5C7378"/>
+                </a:solidFill>
+                <a:latin typeface="Calibri" pitchFamily="34" charset="0"/>
+                <a:ea typeface="Calibri" pitchFamily="34" charset="-122"/>
+                <a:cs typeface="Calibri" pitchFamily="34" charset="-120"/>
+              </a:rPr>
+              <a:t>Resolves the remaining ambiguous matches.</a:t>
+            </a:r>
+            <a:endParaRPr lang="en-US" sz="1300" dirty="0"/>
+          </a:p>
+        </p:txBody>
+      </p:sp>
+      <p:sp>
+        <p:nvSpPr>
+          <p:cNvPr id="19" name="Shape 17"/>
+          <p:cNvSpPr/>
+          <p:nvPr/>
+        </p:nvSpPr>
+        <p:spPr>
+          <a:xfrm>
+            <a:off x="640080" y="4480560"/>
+            <a:ext cx="10881360" cy="841248"/>
+          </a:xfrm>
+          <a:prstGeom prst="roundRect">
+            <a:avLst>
+              <a:gd name="adj" fmla="val 7619"/>
+            </a:avLst>
+          </a:prstGeom>
+          <a:solidFill>
+            <a:srgbClr val="F4F8F8"/>
+          </a:solidFill>
+          <a:ln w="12700">
+            <a:solidFill>
+              <a:srgbClr val="DCE6E7"/>
+            </a:solidFill>
+            <a:prstDash val="solid"/>
+          </a:ln>
+        </p:spPr>
+      </p:sp>
+      <p:sp>
+        <p:nvSpPr>
+          <p:cNvPr id="20" name="Shape 18"/>
+          <p:cNvSpPr/>
+          <p:nvPr/>
+        </p:nvSpPr>
+        <p:spPr>
+          <a:xfrm>
+            <a:off x="914400" y="4681728"/>
+            <a:ext cx="438912" cy="438912"/>
+          </a:xfrm>
+          <a:prstGeom prst="ellipse">
+            <a:avLst/>
+          </a:prstGeom>
+          <a:solidFill>
+            <a:srgbClr val="5C7378"/>
+          </a:solidFill>
+          <a:ln/>
+        </p:spPr>
+      </p:sp>
+      <p:sp>
+        <p:nvSpPr>
+          <p:cNvPr id="21" name="Text 19"/>
+          <p:cNvSpPr/>
+          <p:nvPr/>
+        </p:nvSpPr>
+        <p:spPr>
+          <a:xfrm>
+            <a:off x="914400" y="4681728"/>
+            <a:ext cx="438912" cy="438912"/>
+          </a:xfrm>
+          <a:prstGeom prst="rect">
+            <a:avLst/>
+          </a:prstGeom>
+          <a:noFill/>
+          <a:ln/>
+        </p:spPr>
+        <p:txBody>
+          <a:bodyPr wrap="square" lIns="0" tIns="0" rIns="0" bIns="0" rtlCol="0" anchor="ctr"/>
+          <a:lstStyle/>
+          <a:p>
+            <a:pPr algn="ctr" indent="0" marL="0">
+              <a:buNone/>
+            </a:pPr>
+            <a:r>
+              <a:rPr lang="en-US" sz="1400" b="1" dirty="0">
+                <a:solidFill>
+                  <a:srgbClr val="FFFFFF"/>
+                </a:solidFill>
+                <a:latin typeface="Calibri" pitchFamily="34" charset="0"/>
+                <a:ea typeface="Calibri" pitchFamily="34" charset="-122"/>
+                <a:cs typeface="Calibri" pitchFamily="34" charset="-120"/>
+              </a:rPr>
+              <a:t>›</a:t>
+            </a:r>
+            <a:endParaRPr lang="en-US" sz="1400" dirty="0"/>
+          </a:p>
+        </p:txBody>
+      </p:sp>
+      <p:sp>
+        <p:nvSpPr>
+          <p:cNvPr id="22" name="Text 20"/>
+          <p:cNvSpPr/>
+          <p:nvPr/>
+        </p:nvSpPr>
+        <p:spPr>
+          <a:xfrm>
+            <a:off x="1600200" y="4553712"/>
+            <a:ext cx="9784080" cy="329184"/>
+          </a:xfrm>
+          <a:prstGeom prst="rect">
+            <a:avLst/>
+          </a:prstGeom>
+          <a:noFill/>
+          <a:ln/>
+        </p:spPr>
+        <p:txBody>
+          <a:bodyPr wrap="square" lIns="0" tIns="0" rIns="0" bIns="0" rtlCol="0" anchor="ctr"/>
+          <a:lstStyle/>
+          <a:p>
+            <a:pPr indent="0" marL="0">
+              <a:buNone/>
+            </a:pPr>
+            <a:r>
+              <a:rPr lang="en-US" sz="1600" b="1" dirty="0">
+                <a:solidFill>
+                  <a:srgbClr val="13272B"/>
+                </a:solidFill>
+                <a:latin typeface="Calibri" pitchFamily="34" charset="0"/>
+                <a:ea typeface="Calibri" pitchFamily="34" charset="-122"/>
+                <a:cs typeface="Calibri" pitchFamily="34" charset="-120"/>
+              </a:rPr>
+              <a:t>Score the golden questions in CI</a:t>
+            </a:r>
+            <a:endParaRPr lang="en-US" sz="1600" dirty="0"/>
+          </a:p>
+        </p:txBody>
+      </p:sp>
+      <p:sp>
+        <p:nvSpPr>
+          <p:cNvPr id="23" name="Text 21"/>
+          <p:cNvSpPr/>
+          <p:nvPr/>
+        </p:nvSpPr>
+        <p:spPr>
+          <a:xfrm>
+            <a:off x="1600200" y="4901184"/>
+            <a:ext cx="9784080" cy="329184"/>
+          </a:xfrm>
+          <a:prstGeom prst="rect">
+            <a:avLst/>
+          </a:prstGeom>
+          <a:noFill/>
+          <a:ln/>
+        </p:spPr>
+        <p:txBody>
+          <a:bodyPr wrap="square" lIns="0" tIns="0" rIns="0" bIns="0" rtlCol="0" anchor="ctr"/>
+          <a:lstStyle/>
+          <a:p>
+            <a:pPr indent="0" marL="0">
+              <a:buNone/>
+            </a:pPr>
+            <a:r>
+              <a:rPr lang="en-US" sz="1300" dirty="0">
+                <a:solidFill>
+                  <a:srgbClr val="5C7378"/>
+                </a:solidFill>
+                <a:latin typeface="Calibri" pitchFamily="34" charset="0"/>
+                <a:ea typeface="Calibri" pitchFamily="34" charset="-122"/>
+                <a:cs typeface="Calibri" pitchFamily="34" charset="-120"/>
+              </a:rPr>
+              <a:t>Thirty-six of them, so an Ask regression fails a build and not a demo.</a:t>
+            </a:r>
+            <a:endParaRPr lang="en-US" sz="1300" dirty="0"/>
+          </a:p>
+        </p:txBody>
+      </p:sp>
+      <p:sp>
+        <p:nvSpPr>
+          <p:cNvPr id="24" name="Shape 17 r5"/>
+          <p:cNvSpPr/>
+          <p:nvPr/>
+        </p:nvSpPr>
+        <p:spPr>
+          <a:xfrm>
+            <a:off x="640080" y="5394960"/>
+            <a:ext cx="10881360" cy="841248"/>
+          </a:xfrm>
+          <a:prstGeom prst="roundRect">
+            <a:avLst>
+              <a:gd name="adj" fmla="val 7619"/>
+            </a:avLst>
+          </a:prstGeom>
+          <a:solidFill>
+            <a:srgbClr val="F4F8F8"/>
+          </a:solidFill>
+          <a:ln w="12700">
+            <a:solidFill>
+              <a:srgbClr val="DCE6E7"/>
+            </a:solidFill>
+            <a:prstDash val="solid"/>
+          </a:ln>
+        </p:spPr>
+      </p:sp>
+      <p:sp>
+        <p:nvSpPr>
+          <p:cNvPr id="25" name="Shape 18 r5"/>
+          <p:cNvSpPr/>
+          <p:nvPr/>
+        </p:nvSpPr>
+        <p:spPr>
+          <a:xfrm>
+            <a:off x="914400" y="5596128"/>
+            <a:ext cx="438912" cy="438912"/>
+          </a:xfrm>
+          <a:prstGeom prst="ellipse">
+            <a:avLst/>
+          </a:prstGeom>
+          <a:solidFill>
+            <a:srgbClr val="5C7378"/>
+          </a:solidFill>
+          <a:ln/>
+        </p:spPr>
+      </p:sp>
+      <p:sp>
+        <p:nvSpPr>
+          <p:cNvPr id="26" name="Text 19 r5"/>
+          <p:cNvSpPr/>
+          <p:nvPr/>
+        </p:nvSpPr>
+        <p:spPr>
+          <a:xfrm>
+            <a:off x="914400" y="5596128"/>
+            <a:ext cx="438912" cy="438912"/>
+          </a:xfrm>
+          <a:prstGeom prst="rect">
+            <a:avLst/>
+          </a:prstGeom>
+          <a:noFill/>
+          <a:ln/>
+        </p:spPr>
+        <p:txBody>
+          <a:bodyPr wrap="square" lIns="0" tIns="0" rIns="0" bIns="0" rtlCol="0" anchor="ctr"/>
+          <a:lstStyle/>
+          <a:p>
+            <a:pPr algn="ctr" indent="0" marL="0">
+              <a:buNone/>
+            </a:pPr>
+            <a:r>
+              <a:rPr lang="en-US" sz="1400" b="1" dirty="0">
+                <a:solidFill>
+                  <a:srgbClr val="FFFFFF"/>
+                </a:solidFill>
+                <a:latin typeface="Calibri" pitchFamily="34" charset="0"/>
+                <a:ea typeface="Calibri" pitchFamily="34" charset="-122"/>
+                <a:cs typeface="Calibri" pitchFamily="34" charset="-120"/>
+              </a:rPr>
+              <a:t>›</a:t>
+            </a:r>
+            <a:endParaRPr lang="en-US" sz="1400" dirty="0"/>
+          </a:p>
+        </p:txBody>
+      </p:sp>
+      <p:sp>
+        <p:nvSpPr>
+          <p:cNvPr id="27" name="Text 20 r5"/>
+          <p:cNvSpPr/>
+          <p:nvPr/>
+        </p:nvSpPr>
+        <p:spPr>
+          <a:xfrm>
+            <a:off x="1600200" y="5468112"/>
+            <a:ext cx="9784080" cy="329184"/>
+          </a:xfrm>
+          <a:prstGeom prst="rect">
+            <a:avLst/>
+          </a:prstGeom>
+          <a:noFill/>
+          <a:ln/>
+        </p:spPr>
+        <p:txBody>
+          <a:bodyPr wrap="square" lIns="0" tIns="0" rIns="0" bIns="0" rtlCol="0" anchor="ctr"/>
+          <a:lstStyle/>
+          <a:p>
+            <a:pPr indent="0" marL="0">
+              <a:buNone/>
+            </a:pPr>
+            <a:r>
+              <a:rPr lang="en-US" sz="1600" b="1" dirty="0">
+                <a:solidFill>
+                  <a:srgbClr val="13272B"/>
+                </a:solidFill>
+                <a:latin typeface="Calibri" pitchFamily="34" charset="0"/>
+                <a:ea typeface="Calibri" pitchFamily="34" charset="-122"/>
+                <a:cs typeface="Calibri" pitchFamily="34" charset="-120"/>
+              </a:rPr>
+              <a:t>Log every question and the SQL it produced</a:t>
+            </a:r>
+            <a:endParaRPr lang="en-US" sz="1600" dirty="0"/>
+          </a:p>
+        </p:txBody>
+      </p:sp>
+      <p:sp>
+        <p:nvSpPr>
+          <p:cNvPr id="28" name="Text 21 r5"/>
+          <p:cNvSpPr/>
+          <p:nvPr/>
+        </p:nvSpPr>
+        <p:spPr>
+          <a:xfrm>
+            <a:off x="1600200" y="5815584"/>
+            <a:ext cx="9784080" cy="329184"/>
+          </a:xfrm>
+          <a:prstGeom prst="rect">
+            <a:avLst/>
+          </a:prstGeom>
+          <a:noFill/>
+          <a:ln/>
+        </p:spPr>
+        <p:txBody>
+          <a:bodyPr wrap="square" lIns="0" tIns="0" rIns="0" bIns="0" rtlCol="0" anchor="ctr"/>
+          <a:lstStyle/>
+          <a:p>
+            <a:pPr indent="0" marL="0">
+              <a:buNone/>
+            </a:pPr>
+            <a:r>
+              <a:rPr lang="en-US" sz="1300" dirty="0">
+                <a:solidFill>
+                  <a:srgbClr val="5C7378"/>
+                </a:solidFill>
+                <a:latin typeface="Calibri" pitchFamily="34" charset="0"/>
+                <a:ea typeface="Calibri" pitchFamily="34" charset="-122"/>
+                <a:cs typeface="Calibri" pitchFamily="34" charset="-120"/>
+              </a:rPr>
+              <a:t>Tune Ask on failures it actually had, rather than ones we invented.</a:t>
+            </a:r>
+            <a:endParaRPr lang="en-US" sz="1300" dirty="0"/>
+          </a:p>
+        </p:txBody>
+      </p:sp>
+    </p:spTree>
+  </p:cSld>
+  <p:clrMapOvr>
+    <a:masterClrMapping/>
+  </p:clrMapOvr>
+</p:sld>
+</file>
+
+<file path=ppt/slides/slide21.xml><?xml version="1.0" encoding="utf-8"?>
+<p:sld xmlns:a="http://schemas.openxmlformats.org/drawingml/2006/main" xmlns:r="http://schemas.openxmlformats.org/officeDocument/2006/relationships" xmlns:p="http://schemas.openxmlformats.org/presentationml/2006/main">
+  <p:cSld name="Slide 18">
+    <p:bg>
+      <p:bgPr>
+        <a:solidFill>
+          <a:srgbClr val="0B3A3E"/>
+        </a:solidFill>
+      </p:bgPr>
+    </p:bg>
+    <p:spTree>
+      <p:nvGrpSpPr>
+        <p:cNvPr id="1" name=""/>
+        <p:cNvGrpSpPr/>
+        <p:nvPr/>
+      </p:nvGrpSpPr>
+      <p:grpSpPr>
+        <a:xfrm>
+          <a:off x="0" y="0"/>
+          <a:ext cx="0" cy="0"/>
+          <a:chOff x="0" y="0"/>
+          <a:chExt cx="0" cy="0"/>
+        </a:xfrm>
+      </p:grpSpPr>
+      <p:sp>
+        <p:nvSpPr>
+          <p:cNvPr id="2" name="Text 0"/>
+          <p:cNvSpPr/>
+          <p:nvPr/>
+        </p:nvSpPr>
+        <p:spPr>
+          <a:xfrm>
+            <a:off x="640080" y="1371600"/>
+            <a:ext cx="10058400" cy="365760"/>
+          </a:xfrm>
+          <a:prstGeom prst="rect">
+            <a:avLst/>
+          </a:prstGeom>
+          <a:noFill/>
+          <a:ln/>
+        </p:spPr>
+        <p:txBody>
+          <a:bodyPr wrap="square" lIns="0" tIns="0" rIns="0" bIns="0" rtlCol="0" anchor="ctr"/>
+          <a:lstStyle/>
+          <a:p>
+            <a:pPr indent="0" marL="0">
+              <a:buNone/>
+            </a:pPr>
+            <a:r>
+              <a:rPr lang="en-US" sz="1400" b="1" spc="200" kern="0" dirty="0">
+                <a:solidFill>
+                  <a:srgbClr val="02C39A"/>
+                </a:solidFill>
+                <a:latin typeface="Calibri" pitchFamily="34" charset="0"/>
+                <a:ea typeface="Calibri" pitchFamily="34" charset="-122"/>
+                <a:cs typeface="Calibri" pitchFamily="34" charset="-120"/>
+              </a:rPr>
+              <a:t>IN ONE SENTENCE</a:t>
+            </a:r>
+            <a:endParaRPr lang="en-US" sz="1400" dirty="0"/>
+          </a:p>
+        </p:txBody>
+      </p:sp>
+      <p:sp>
+        <p:nvSpPr>
+          <p:cNvPr id="3" name="Text 1"/>
+          <p:cNvSpPr/>
+          <p:nvPr/>
+        </p:nvSpPr>
+        <p:spPr>
+          <a:xfrm>
+            <a:off x="640080" y="2148840"/>
+            <a:ext cx="10881360" cy="2651760"/>
+          </a:xfrm>
+          <a:prstGeom prst="rect">
+            <a:avLst/>
+          </a:prstGeom>
+          <a:noFill/>
+          <a:ln/>
+        </p:spPr>
+        <p:txBody>
+          <a:bodyPr wrap="square" lIns="0" tIns="0" rIns="0" bIns="0" rtlCol="0" anchor="ctr"/>
+          <a:lstStyle/>
+          <a:p>
+            <a:pPr indent="0" marL="0">
+              <a:lnSpc>
+                <a:spcPts val="4200"/>
+              </a:lnSpc>
+              <a:buNone/>
+            </a:pPr>
+            <a:r>
+              <a:rPr lang="en-US" sz="2700" b="1" dirty="0">
+                <a:solidFill>
+                  <a:srgbClr val="FFFFFF"/>
+                </a:solidFill>
+                <a:latin typeface="Cambria" pitchFamily="34" charset="0"/>
+                <a:ea typeface="Cambria" pitchFamily="34" charset="-122"/>
+                <a:cs typeface="Cambria" pitchFamily="34" charset="-120"/>
+              </a:rPr>
+              <a:t>The guarantees hold because of how the system is built —</a:t>
+            </a:r>
+            <a:endParaRPr lang="en-US" sz="2700" dirty="0"/>
+          </a:p>
+          <a:p>
+            <a:pPr indent="0" marL="0">
+              <a:lnSpc>
+                <a:spcPts val="4200"/>
+              </a:lnSpc>
+              <a:buNone/>
+            </a:pPr>
+            <a:r>
+              <a:rPr lang="en-US" sz="2700" b="1" dirty="0">
+                <a:solidFill>
+                  <a:srgbClr val="FFFFFF"/>
+                </a:solidFill>
+                <a:latin typeface="Cambria" pitchFamily="34" charset="0"/>
+                <a:ea typeface="Cambria" pitchFamily="34" charset="-122"/>
+                <a:cs typeface="Cambria" pitchFamily="34" charset="-120"/>
+              </a:rPr>
+              <a:t>an append-only ledger the database itself protects,</a:t>
+            </a:r>
+            <a:endParaRPr lang="en-US" sz="2700" dirty="0"/>
+          </a:p>
+          <a:p>
+            <a:pPr indent="0" marL="0">
+              <a:lnSpc>
+                <a:spcPts val="4200"/>
+              </a:lnSpc>
+              <a:buNone/>
+            </a:pPr>
+            <a:r>
+              <a:rPr lang="en-US" sz="2700" b="1" dirty="0">
+                <a:solidFill>
+                  <a:srgbClr val="FFFFFF"/>
+                </a:solidFill>
+                <a:latin typeface="Cambria" pitchFamily="34" charset="0"/>
+                <a:ea typeface="Cambria" pitchFamily="34" charset="-122"/>
+                <a:cs typeface="Cambria" pitchFamily="34" charset="-120"/>
+              </a:rPr>
+              <a:t>and a model that can only produce something checkable —</a:t>
+            </a:r>
+            <a:endParaRPr lang="en-US" sz="2700" dirty="0"/>
+          </a:p>
+          <a:p>
+            <a:pPr indent="0" marL="0">
+              <a:lnSpc>
+                <a:spcPts val="4200"/>
+              </a:lnSpc>
+              <a:buNone/>
+            </a:pPr>
+            <a:r>
+              <a:rPr lang="en-US" sz="2700" b="1" dirty="0">
+                <a:solidFill>
+                  <a:srgbClr val="FFFFFF"/>
+                </a:solidFill>
+                <a:latin typeface="Cambria" pitchFamily="34" charset="0"/>
+                <a:ea typeface="Cambria" pitchFamily="34" charset="-122"/>
+                <a:cs typeface="Cambria" pitchFamily="34" charset="-120"/>
+              </a:rPr>
+              <a:t>not because everyone remembered to be careful.</a:t>
+            </a:r>
+            <a:endParaRPr lang="en-US" sz="2700" dirty="0"/>
+          </a:p>
+        </p:txBody>
+      </p:sp>
+      <p:sp>
+        <p:nvSpPr>
+          <p:cNvPr id="4" name="Shape 2"/>
+          <p:cNvSpPr/>
+          <p:nvPr/>
+        </p:nvSpPr>
+        <p:spPr>
+          <a:xfrm>
+            <a:off x="640080" y="5257800"/>
+            <a:ext cx="502920" cy="502920"/>
+          </a:xfrm>
+          <a:prstGeom prst="ellipse">
+            <a:avLst/>
+          </a:prstGeom>
+          <a:solidFill>
+            <a:srgbClr val="028090"/>
+          </a:solidFill>
+          <a:ln/>
+        </p:spPr>
+      </p:sp>
+      <p:sp>
+        <p:nvSpPr>
+          <p:cNvPr id="5" name="Text 3"/>
+          <p:cNvSpPr/>
+          <p:nvPr/>
+        </p:nvSpPr>
+        <p:spPr>
+          <a:xfrm>
+            <a:off x="640080" y="5257800"/>
+            <a:ext cx="502920" cy="502920"/>
+          </a:xfrm>
+          <a:prstGeom prst="rect">
+            <a:avLst/>
+          </a:prstGeom>
+          <a:noFill/>
+          <a:ln/>
+        </p:spPr>
+        <p:txBody>
+          <a:bodyPr wrap="square" lIns="0" tIns="0" rIns="0" bIns="0" rtlCol="0" anchor="ctr"/>
+          <a:lstStyle/>
+          <a:p>
+            <a:pPr algn="ctr" indent="0" marL="0">
+              <a:buNone/>
+            </a:pPr>
+            <a:r>
+              <a:rPr lang="en-US" sz="1800" b="1" dirty="0">
+                <a:solidFill>
+                  <a:srgbClr val="FFFFFF"/>
+                </a:solidFill>
+                <a:latin typeface="Cambria" pitchFamily="34" charset="0"/>
+                <a:ea typeface="Cambria" pitchFamily="34" charset="-122"/>
+                <a:cs typeface="Cambria" pitchFamily="34" charset="-120"/>
+              </a:rPr>
+              <a:t>Rx</a:t>
+            </a:r>
+            <a:endParaRPr lang="en-US" sz="1800" dirty="0"/>
+          </a:p>
+        </p:txBody>
+      </p:sp>
+      <p:sp>
+        <p:nvSpPr>
+          <p:cNvPr id="6" name="Text 4"/>
+          <p:cNvSpPr/>
+          <p:nvPr/>
+        </p:nvSpPr>
+        <p:spPr>
+          <a:xfrm>
+            <a:off x="1353312" y="5257800"/>
+            <a:ext cx="5486400" cy="502920"/>
+          </a:xfrm>
+          <a:prstGeom prst="rect">
+            <a:avLst/>
+          </a:prstGeom>
+          <a:noFill/>
+          <a:ln/>
+        </p:spPr>
+        <p:txBody>
+          <a:bodyPr wrap="square" lIns="0" tIns="0" rIns="0" bIns="0" rtlCol="0" anchor="ctr"/>
+          <a:lstStyle/>
+          <a:p>
+            <a:pPr indent="0" marL="0">
+              <a:buNone/>
+            </a:pPr>
+            <a:r>
+              <a:rPr lang="en-US" sz="2600" b="1" dirty="0">
+                <a:solidFill>
+                  <a:srgbClr val="02C39A"/>
+                </a:solidFill>
+                <a:latin typeface="Cambria" pitchFamily="34" charset="0"/>
+                <a:ea typeface="Cambria" pitchFamily="34" charset="-122"/>
+                <a:cs typeface="Cambria" pitchFamily="34" charset="-120"/>
+              </a:rPr>
+              <a:t>Questions</a:t>
+            </a:r>
+            <a:endParaRPr lang="en-US" sz="2600" dirty="0"/>
           </a:p>
         </p:txBody>
       </p:sp>

--- a/docs/pharmacy-inventory-deck.pptx
+++ b/docs/pharmacy-inventory-deck.pptx
@@ -5732,7 +5732,7 @@
                 <a:ea typeface="Calibri" pitchFamily="34" charset="-122"/>
                 <a:cs typeface="Calibri" pitchFamily="34" charset="-120"/>
               </a:rPr>
-              <a:t>Fifty questions, each checked against SQL written by hand. Nothing crashed — seven answers were wrong.</a:t>
+              <a:t>Fifty questions, each checked against SQL written by hand. Nothing crashed. Seven were wrong.</a:t>
             </a:r>
             <a:endParaRPr lang="en-US" sz="1500" dirty="0"/>
           </a:p>
